--- a/Mental_Health_Safety_Moment.pptx
+++ b/Mental_Health_Safety_Moment.pptx
@@ -6,6 +6,13 @@
   </p:sldMasterIdLst>
   <p:sldIdLst>
     <p:sldId id="256" r:id="rId7"/>
+    <p:sldId id="257" r:id="rId8"/>
+    <p:sldId id="258" r:id="rId9"/>
+    <p:sldId id="259" r:id="rId10"/>
+    <p:sldId id="260" r:id="rId11"/>
+    <p:sldId id="261" r:id="rId12"/>
+    <p:sldId id="262" r:id="rId13"/>
+    <p:sldId id="263" r:id="rId14"/>
   </p:sldIdLst>
   <p:sldSz cx="12191695" cy="6858000" type="screen4x3"/>
   <p:notesSz cx="6858000" cy="9144000"/>
@@ -3081,14 +3088,6 @@
 <file path=ppt/slides/slide1.xml><?xml version="1.0" encoding="utf-8"?>
 <p:sld xmlns:a="http://schemas.openxmlformats.org/drawingml/2006/main" xmlns:p="http://schemas.openxmlformats.org/presentationml/2006/main" xmlns:r="http://schemas.openxmlformats.org/officeDocument/2006/relationships">
   <p:cSld>
-    <p:bg>
-      <p:bgPr>
-        <a:solidFill>
-          <a:srgbClr val="0B2E3F"/>
-        </a:solidFill>
-        <a:effectLst/>
-      </p:bgPr>
-    </p:bg>
     <p:spTree>
       <p:nvGrpSpPr>
         <p:cNvPr id="1" name=""/>
@@ -3105,13 +3104,13 @@
         <p:spPr>
           <a:xfrm>
             <a:off x="0" y="0"/>
-            <a:ext cx="320040" cy="6858000"/>
+            <a:ext cx="4114800" cy="6858000"/>
           </a:xfrm>
           <a:prstGeom prst="rect">
             <a:avLst/>
           </a:prstGeom>
           <a:solidFill>
-            <a:srgbClr val="F4A236"/>
+            <a:srgbClr val="0000CC"/>
           </a:solidFill>
           <a:ln>
             <a:noFill/>
@@ -3141,23 +3140,23 @@
       </p:sp>
       <p:sp>
         <p:nvSpPr>
-          <p:cNvPr id="3" name="Rectangle 2"/>
+          <p:cNvPr id="3" name="Rounded Rectangle 2"/>
           <p:cNvSpPr/>
           <p:nvPr/>
         </p:nvSpPr>
         <p:spPr>
           <a:xfrm>
-            <a:off x="320040" y="0"/>
-            <a:ext cx="11887200" cy="54864"/>
-          </a:xfrm>
-          <a:prstGeom prst="rect">
-            <a:avLst/>
-          </a:prstGeom>
-          <a:solidFill>
-            <a:srgbClr val="F4A236"/>
-          </a:solidFill>
-          <a:ln>
-            <a:noFill/>
+            <a:off x="365760" y="365760"/>
+            <a:ext cx="3291840" cy="1188720"/>
+          </a:xfrm>
+          <a:prstGeom prst="roundRect">
+            <a:avLst/>
+          </a:prstGeom>
+          <a:noFill/>
+          <a:ln w="38100">
+            <a:solidFill>
+              <a:srgbClr val="FFFFFF"/>
+            </a:solidFill>
           </a:ln>
         </p:spPr>
         <p:style>
@@ -3178,29 +3177,38 @@
           <a:bodyPr rtlCol="0" anchor="ctr"/>
           <a:lstStyle/>
           <a:p>
-            <a:pPr algn="ctr"/>
-          </a:p>
-        </p:txBody>
-      </p:sp>
-      <p:sp>
-        <p:nvSpPr>
-          <p:cNvPr id="4" name="Rectangle 3"/>
+            <a:pPr algn="ctr">
+              <a:defRPr sz="2800" b="1">
+                <a:solidFill>
+                  <a:srgbClr val="FFFFFF"/>
+                </a:solidFill>
+              </a:defRPr>
+            </a:pPr>
+            <a:r>
+              <a:t>Safe Moment</a:t>
+            </a:r>
+          </a:p>
+        </p:txBody>
+      </p:sp>
+      <p:sp>
+        <p:nvSpPr>
+          <p:cNvPr id="4" name="Isosceles Triangle 3"/>
           <p:cNvSpPr/>
           <p:nvPr/>
         </p:nvSpPr>
         <p:spPr>
-          <a:xfrm>
-            <a:off x="0" y="6492240"/>
-            <a:ext cx="12191695" cy="365760"/>
-          </a:xfrm>
-          <a:prstGeom prst="rect">
-            <a:avLst/>
-          </a:prstGeom>
-          <a:solidFill>
-            <a:srgbClr val="081F2C"/>
-          </a:solidFill>
-          <a:ln>
-            <a:noFill/>
+          <a:xfrm rot="10800000">
+            <a:off x="1097280" y="1508760"/>
+            <a:ext cx="457200" cy="365760"/>
+          </a:xfrm>
+          <a:prstGeom prst="triangle">
+            <a:avLst/>
+          </a:prstGeom>
+          <a:noFill/>
+          <a:ln w="38100">
+            <a:solidFill>
+              <a:srgbClr val="FFFFFF"/>
+            </a:solidFill>
           </a:ln>
         </p:spPr>
         <p:style>
@@ -3227,25 +3235,23 @@
       </p:sp>
       <p:sp>
         <p:nvSpPr>
-          <p:cNvPr id="5" name="Rounded Rectangle 4"/>
+          <p:cNvPr id="5" name="Isosceles Triangle 4"/>
           <p:cNvSpPr/>
           <p:nvPr/>
         </p:nvSpPr>
         <p:spPr>
           <a:xfrm>
-            <a:off x="731520" y="320040"/>
-            <a:ext cx="3840480" cy="685800"/>
-          </a:xfrm>
-          <a:prstGeom prst="roundRect">
-            <a:avLst>
-              <a:gd name="adj" fmla="val 15000"/>
-            </a:avLst>
-          </a:prstGeom>
-          <a:solidFill>
-            <a:srgbClr val="F4A236"/>
-          </a:solidFill>
-          <a:ln>
-            <a:noFill/>
+            <a:off x="457200" y="5120640"/>
+            <a:ext cx="822960" cy="731520"/>
+          </a:xfrm>
+          <a:prstGeom prst="triangle">
+            <a:avLst/>
+          </a:prstGeom>
+          <a:noFill/>
+          <a:ln w="25400">
+            <a:solidFill>
+              <a:srgbClr val="FFFFFF"/>
+            </a:solidFill>
           </a:ln>
         </p:spPr>
         <p:style>
@@ -3263,20 +3269,10 @@
           </a:fontRef>
         </p:style>
         <p:txBody>
-          <a:bodyPr rtlCol="0" anchor="ctr" wrap="square"/>
-          <a:lstStyle/>
-          <a:p>
-            <a:pPr algn="ctr">
-              <a:defRPr sz="2600" b="1">
-                <a:solidFill>
-                  <a:srgbClr val="0B2E3F"/>
-                </a:solidFill>
-                <a:latin typeface="Calibri"/>
-              </a:defRPr>
-            </a:pPr>
-            <a:r>
-              <a:t>SAFETY MOMENT</a:t>
-            </a:r>
+          <a:bodyPr rtlCol="0" anchor="ctr"/>
+          <a:lstStyle/>
+          <a:p>
+            <a:pPr algn="ctr"/>
           </a:p>
         </p:txBody>
       </p:sp>
@@ -3288,8 +3284,8 @@
         </p:nvSpPr>
         <p:spPr>
           <a:xfrm>
-            <a:off x="731520" y="1234440"/>
-            <a:ext cx="10515600" cy="822960"/>
+            <a:off x="457200" y="5212080"/>
+            <a:ext cx="822960" cy="640080"/>
           </a:xfrm>
           <a:prstGeom prst="rect">
             <a:avLst/>
@@ -3297,85 +3293,40 @@
           <a:noFill/>
         </p:spPr>
         <p:txBody>
-          <a:bodyPr wrap="square">
+          <a:bodyPr wrap="none">
             <a:spAutoFit/>
           </a:bodyPr>
           <a:lstStyle/>
           <a:p>
-            <a:pPr algn="l"/>
-            <a:r>
-              <a:rPr sz="3600" b="1">
+            <a:pPr algn="ctr">
+              <a:defRPr sz="2400" b="1">
                 <a:solidFill>
                   <a:srgbClr val="FFFFFF"/>
                 </a:solidFill>
-                <a:latin typeface="Calibri"/>
-              </a:rPr>
-              <a:t>Mental Health </a:t>
-            </a:r>
-            <a:r>
-              <a:rPr sz="3600" b="1">
-                <a:solidFill>
-                  <a:srgbClr val="F4A236"/>
-                </a:solidFill>
-                <a:latin typeface="Calibri"/>
-              </a:rPr>
-              <a:t>&amp; Workplace Safety</a:t>
-            </a:r>
-          </a:p>
-        </p:txBody>
-      </p:sp>
-      <p:sp>
-        <p:nvSpPr>
-          <p:cNvPr id="7" name="TextBox 6"/>
-          <p:cNvSpPr txBox="1"/>
-          <p:nvPr/>
-        </p:nvSpPr>
-        <p:spPr>
-          <a:xfrm>
-            <a:off x="731520" y="1965960"/>
-            <a:ext cx="10515600" cy="457200"/>
+              </a:defRPr>
+            </a:pPr>
+            <a:r>
+              <a:t>!</a:t>
+            </a:r>
+          </a:p>
+        </p:txBody>
+      </p:sp>
+      <p:sp>
+        <p:nvSpPr>
+          <p:cNvPr id="7" name="Rectangle 6"/>
+          <p:cNvSpPr/>
+          <p:nvPr/>
+        </p:nvSpPr>
+        <p:spPr>
+          <a:xfrm>
+            <a:off x="457200" y="5989320"/>
+            <a:ext cx="3200400" cy="25400"/>
           </a:xfrm>
           <a:prstGeom prst="rect">
             <a:avLst/>
           </a:prstGeom>
-          <a:noFill/>
-        </p:spPr>
-        <p:txBody>
-          <a:bodyPr wrap="square">
-            <a:spAutoFit/>
-          </a:bodyPr>
-          <a:lstStyle/>
-          <a:p>
-            <a:pPr algn="l">
-              <a:defRPr sz="1800" i="1">
-                <a:solidFill>
-                  <a:srgbClr val="A8D8EA"/>
-                </a:solidFill>
-                <a:latin typeface="Calibri"/>
-              </a:defRPr>
-            </a:pPr>
-            <a:r>
-              <a:t>"A healthy mind leads to a safer workplace."</a:t>
-            </a:r>
-          </a:p>
-        </p:txBody>
-      </p:sp>
-      <p:sp>
-        <p:nvSpPr>
-          <p:cNvPr id="8" name="Rectangle 7"/>
-          <p:cNvSpPr/>
-          <p:nvPr/>
-        </p:nvSpPr>
-        <p:spPr>
-          <a:xfrm>
-            <a:off x="731520" y="2514600"/>
-            <a:ext cx="10515600" cy="27432"/>
-          </a:xfrm>
-          <a:prstGeom prst="rect">
-            <a:avLst/>
-          </a:prstGeom>
           <a:solidFill>
-            <a:srgbClr val="F4A236"/>
+            <a:srgbClr val="FFFFFF"/>
           </a:solidFill>
           <a:ln>
             <a:noFill/>
@@ -3405,26 +3356,144 @@
       </p:sp>
       <p:sp>
         <p:nvSpPr>
-          <p:cNvPr id="9" name="Rounded Rectangle 8"/>
+          <p:cNvPr id="8" name="TextBox 7"/>
+          <p:cNvSpPr txBox="1"/>
+          <p:nvPr/>
+        </p:nvSpPr>
+        <p:spPr>
+          <a:xfrm>
+            <a:off x="457200" y="6126480"/>
+            <a:ext cx="1828800" cy="548640"/>
+          </a:xfrm>
+          <a:prstGeom prst="rect">
+            <a:avLst/>
+          </a:prstGeom>
+          <a:noFill/>
+        </p:spPr>
+        <p:txBody>
+          <a:bodyPr wrap="none">
+            <a:spAutoFit/>
+          </a:bodyPr>
+          <a:lstStyle/>
+          <a:p>
+            <a:pPr>
+              <a:defRPr sz="3200" b="1">
+                <a:solidFill>
+                  <a:srgbClr val="FFFFFF"/>
+                </a:solidFill>
+              </a:defRPr>
+            </a:pPr>
+            <a:r>
+              <a:t>slb</a:t>
+            </a:r>
+          </a:p>
+        </p:txBody>
+      </p:sp>
+      <p:sp>
+        <p:nvSpPr>
+          <p:cNvPr id="9" name="TextBox 8"/>
+          <p:cNvSpPr txBox="1"/>
+          <p:nvPr/>
+        </p:nvSpPr>
+        <p:spPr>
+          <a:xfrm>
+            <a:off x="4572000" y="1371600"/>
+            <a:ext cx="7132320" cy="731520"/>
+          </a:xfrm>
+          <a:prstGeom prst="rect">
+            <a:avLst/>
+          </a:prstGeom>
+          <a:noFill/>
+        </p:spPr>
+        <p:txBody>
+          <a:bodyPr wrap="none">
+            <a:spAutoFit/>
+          </a:bodyPr>
+          <a:lstStyle/>
+          <a:p>
+            <a:pPr>
+              <a:defRPr sz="2800" b="1">
+                <a:solidFill>
+                  <a:srgbClr val="0000CC"/>
+                </a:solidFill>
+              </a:defRPr>
+            </a:pPr>
+            <a:r>
+              <a:t>Mental Health in the Workplace</a:t>
+            </a:r>
+          </a:p>
+        </p:txBody>
+      </p:sp>
+      <p:sp>
+        <p:nvSpPr>
+          <p:cNvPr id="10" name="TextBox 9"/>
+          <p:cNvSpPr txBox="1"/>
+          <p:nvPr/>
+        </p:nvSpPr>
+        <p:spPr>
+          <a:xfrm>
+            <a:off x="4572000" y="2286000"/>
+            <a:ext cx="7132320" cy="914400"/>
+          </a:xfrm>
+          <a:prstGeom prst="rect">
+            <a:avLst/>
+          </a:prstGeom>
+          <a:noFill/>
+        </p:spPr>
+        <p:txBody>
+          <a:bodyPr wrap="square">
+            <a:spAutoFit/>
+          </a:bodyPr>
+          <a:lstStyle/>
+          <a:p>
+            <a:pPr>
+              <a:defRPr sz="2200" i="1">
+                <a:solidFill>
+                  <a:srgbClr val="666666"/>
+                </a:solidFill>
+              </a:defRPr>
+            </a:pPr>
+            <a:r>
+              <a:t>Your mind is your most important piece of PPE.</a:t>
+            </a:r>
+          </a:p>
+          <a:p>
+            <a:pPr>
+              <a:spcBef>
+                <a:spcPts val="1600"/>
+              </a:spcBef>
+              <a:defRPr sz="1800">
+                <a:solidFill>
+                  <a:srgbClr val="333333"/>
+                </a:solidFill>
+              </a:defRPr>
+            </a:pPr>
+            <a:r>
+              <a:t>A Safety Moment on Recognizing, Responding &amp; Supporting</a:t>
+            </a:r>
+          </a:p>
+        </p:txBody>
+      </p:sp>
+      <p:sp>
+        <p:nvSpPr>
+          <p:cNvPr id="11" name="Rounded Rectangle 10"/>
           <p:cNvSpPr/>
           <p:nvPr/>
         </p:nvSpPr>
         <p:spPr>
           <a:xfrm>
-            <a:off x="731520" y="2834640"/>
-            <a:ext cx="3291840" cy="3200400"/>
+            <a:off x="4572000" y="3840480"/>
+            <a:ext cx="2103120" cy="1645920"/>
           </a:xfrm>
           <a:prstGeom prst="roundRect">
-            <a:avLst>
-              <a:gd name="adj" fmla="val 5000"/>
-            </a:avLst>
+            <a:avLst/>
           </a:prstGeom>
           <a:solidFill>
-            <a:srgbClr val="103D52"/>
+            <a:srgbClr val="E8F0FE"/>
           </a:solidFill>
-          <a:ln w="12700">
+          <a:ln w="19050">
             <a:solidFill>
-              <a:srgbClr val="1A5A72"/>
+              <a:srgbClr val="0000CC"/>
             </a:solidFill>
           </a:ln>
         </p:spPr>
@@ -3443,32 +3512,59 @@
           </a:fontRef>
         </p:style>
         <p:txBody>
-          <a:bodyPr rtlCol="0" anchor="ctr"/>
-          <a:lstStyle/>
-          <a:p>
-            <a:pPr algn="ctr"/>
-          </a:p>
-        </p:txBody>
-      </p:sp>
-      <p:sp>
-        <p:nvSpPr>
-          <p:cNvPr id="10" name="Rectangle 9"/>
+          <a:bodyPr rtlCol="0" anchor="ctr" wrap="square"/>
+          <a:lstStyle/>
+          <a:p>
+            <a:pPr algn="ctr">
+              <a:defRPr sz="3000" b="1">
+                <a:solidFill>
+                  <a:srgbClr val="0000CC"/>
+                </a:solidFill>
+              </a:defRPr>
+            </a:pPr>
+            <a:r>
+              <a:t>1 in 5</a:t>
+            </a:r>
+          </a:p>
+          <a:p>
+            <a:pPr algn="ctr">
+              <a:defRPr sz="1200">
+                <a:solidFill>
+                  <a:srgbClr val="333333"/>
+                </a:solidFill>
+              </a:defRPr>
+            </a:pPr>
+            <a:r>
+              <a:t>adults experience</a:t>
+            </a:r>
+            <a:br/>
+            <a:r>
+              <a:t>mental illness each year</a:t>
+            </a:r>
+          </a:p>
+        </p:txBody>
+      </p:sp>
+      <p:sp>
+        <p:nvSpPr>
+          <p:cNvPr id="12" name="Rounded Rectangle 11"/>
           <p:cNvSpPr/>
           <p:nvPr/>
         </p:nvSpPr>
         <p:spPr>
           <a:xfrm>
-            <a:off x="868680" y="2944368"/>
-            <a:ext cx="3017520" cy="45720"/>
-          </a:xfrm>
-          <a:prstGeom prst="rect">
+            <a:off x="6949440" y="3840480"/>
+            <a:ext cx="2103120" cy="1645920"/>
+          </a:xfrm>
+          <a:prstGeom prst="roundRect">
             <a:avLst/>
           </a:prstGeom>
           <a:solidFill>
-            <a:srgbClr val="E74C3C"/>
+            <a:srgbClr val="E8F0FE"/>
           </a:solidFill>
-          <a:ln>
-            <a:noFill/>
+          <a:ln w="19050">
+            <a:solidFill>
+              <a:srgbClr val="0000CC"/>
+            </a:solidFill>
           </a:ln>
         </p:spPr>
         <p:style>
@@ -3486,32 +3582,59 @@
           </a:fontRef>
         </p:style>
         <p:txBody>
-          <a:bodyPr rtlCol="0" anchor="ctr"/>
-          <a:lstStyle/>
-          <a:p>
-            <a:pPr algn="ctr"/>
-          </a:p>
-        </p:txBody>
-      </p:sp>
-      <p:sp>
-        <p:nvSpPr>
-          <p:cNvPr id="11" name="Oval 10"/>
+          <a:bodyPr rtlCol="0" anchor="ctr" wrap="square"/>
+          <a:lstStyle/>
+          <a:p>
+            <a:pPr algn="ctr">
+              <a:defRPr sz="3000" b="1">
+                <a:solidFill>
+                  <a:srgbClr val="0000CC"/>
+                </a:solidFill>
+              </a:defRPr>
+            </a:pPr>
+            <a:r>
+              <a:t>55%</a:t>
+            </a:r>
+          </a:p>
+          <a:p>
+            <a:pPr algn="ctr">
+              <a:defRPr sz="1200">
+                <a:solidFill>
+                  <a:srgbClr val="333333"/>
+                </a:solidFill>
+              </a:defRPr>
+            </a:pPr>
+            <a:r>
+              <a:t>of workers say their job</a:t>
+            </a:r>
+            <a:br/>
+            <a:r>
+              <a:t>affects mental health</a:t>
+            </a:r>
+          </a:p>
+        </p:txBody>
+      </p:sp>
+      <p:sp>
+        <p:nvSpPr>
+          <p:cNvPr id="13" name="Rounded Rectangle 12"/>
           <p:cNvSpPr/>
           <p:nvPr/>
         </p:nvSpPr>
         <p:spPr>
           <a:xfrm>
-            <a:off x="914400" y="3200400"/>
-            <a:ext cx="594360" cy="594360"/>
-          </a:xfrm>
-          <a:prstGeom prst="ellipse">
+            <a:off x="9326880" y="3840480"/>
+            <a:ext cx="2103120" cy="1645920"/>
+          </a:xfrm>
+          <a:prstGeom prst="roundRect">
             <a:avLst/>
           </a:prstGeom>
           <a:solidFill>
-            <a:srgbClr val="E74C3C"/>
+            <a:srgbClr val="E8F0FE"/>
           </a:solidFill>
-          <a:ln>
-            <a:noFill/>
+          <a:ln w="19050">
+            <a:solidFill>
+              <a:srgbClr val="0000CC"/>
+            </a:solidFill>
           </a:ln>
         </p:spPr>
         <p:style>
@@ -3529,116 +3652,75 @@
           </a:fontRef>
         </p:style>
         <p:txBody>
-          <a:bodyPr rtlCol="0" anchor="ctr" wrap="none"/>
+          <a:bodyPr rtlCol="0" anchor="ctr" wrap="square"/>
           <a:lstStyle/>
           <a:p>
             <a:pPr algn="ctr">
-              <a:defRPr sz="2200"/>
-            </a:pPr>
-            <a:r>
-              <a:t>⚠️</a:t>
-            </a:r>
-          </a:p>
-        </p:txBody>
-      </p:sp>
-      <p:sp>
-        <p:nvSpPr>
-          <p:cNvPr id="12" name="TextBox 11"/>
-          <p:cNvSpPr txBox="1"/>
-          <p:nvPr/>
-        </p:nvSpPr>
-        <p:spPr>
-          <a:xfrm>
-            <a:off x="1645920" y="3200400"/>
-            <a:ext cx="2194560" cy="502920"/>
+              <a:defRPr sz="3000" b="1">
+                <a:solidFill>
+                  <a:srgbClr val="0000CC"/>
+                </a:solidFill>
+              </a:defRPr>
+            </a:pPr>
+            <a:r>
+              <a:t>$1 Trillion</a:t>
+            </a:r>
+          </a:p>
+          <a:p>
+            <a:pPr algn="ctr">
+              <a:defRPr sz="1200">
+                <a:solidFill>
+                  <a:srgbClr val="333333"/>
+                </a:solidFill>
+              </a:defRPr>
+            </a:pPr>
+            <a:r>
+              <a:t>lost globally per year</a:t>
+            </a:r>
+            <a:br/>
+            <a:r>
+              <a:t>to anxiety &amp; depression</a:t>
+            </a:r>
+          </a:p>
+        </p:txBody>
+      </p:sp>
+    </p:spTree>
+  </p:cSld>
+  <p:clrMapOvr>
+    <a:masterClrMapping/>
+  </p:clrMapOvr>
+</p:sld>
+</file>
+
+<file path=ppt/slides/slide2.xml><?xml version="1.0" encoding="utf-8"?>
+<p:sld xmlns:a="http://schemas.openxmlformats.org/drawingml/2006/main" xmlns:p="http://schemas.openxmlformats.org/presentationml/2006/main" xmlns:r="http://schemas.openxmlformats.org/officeDocument/2006/relationships">
+  <p:cSld>
+    <p:spTree>
+      <p:nvGrpSpPr>
+        <p:cNvPr id="1" name=""/>
+        <p:cNvGrpSpPr/>
+        <p:nvPr/>
+      </p:nvGrpSpPr>
+      <p:grpSpPr/>
+      <p:sp>
+        <p:nvSpPr>
+          <p:cNvPr id="2" name="Rectangle 1"/>
+          <p:cNvSpPr/>
+          <p:nvPr/>
+        </p:nvSpPr>
+        <p:spPr>
+          <a:xfrm>
+            <a:off x="0" y="0"/>
+            <a:ext cx="4114800" cy="6858000"/>
           </a:xfrm>
           <a:prstGeom prst="rect">
             <a:avLst/>
           </a:prstGeom>
-          <a:noFill/>
-        </p:spPr>
-        <p:txBody>
-          <a:bodyPr wrap="square">
-            <a:spAutoFit/>
-          </a:bodyPr>
-          <a:lstStyle/>
-          <a:p>
-            <a:pPr algn="l">
-              <a:defRPr sz="1400" b="1">
-                <a:solidFill>
-                  <a:srgbClr val="E74C3C"/>
-                </a:solidFill>
-                <a:latin typeface="Calibri"/>
-              </a:defRPr>
-            </a:pPr>
-            <a:r>
-              <a:t>THE IMPACT</a:t>
-            </a:r>
-          </a:p>
-        </p:txBody>
-      </p:sp>
-      <p:sp>
-        <p:nvSpPr>
-          <p:cNvPr id="13" name="TextBox 12"/>
-          <p:cNvSpPr txBox="1"/>
-          <p:nvPr/>
-        </p:nvSpPr>
-        <p:spPr>
-          <a:xfrm>
-            <a:off x="960120" y="3931920"/>
-            <a:ext cx="2834640" cy="1920240"/>
-          </a:xfrm>
-          <a:prstGeom prst="rect">
-            <a:avLst/>
-          </a:prstGeom>
-          <a:noFill/>
-        </p:spPr>
-        <p:txBody>
-          <a:bodyPr wrap="square">
-            <a:spAutoFit/>
-          </a:bodyPr>
-          <a:lstStyle/>
-          <a:p>
-            <a:pPr algn="l">
-              <a:lnSpc>
-                <a:spcPts val="2000"/>
-              </a:lnSpc>
-              <a:defRPr sz="1300">
-                <a:solidFill>
-                  <a:srgbClr val="D5E8EF"/>
-                </a:solidFill>
-                <a:latin typeface="Calibri"/>
-              </a:defRPr>
-            </a:pPr>
-            <a:r>
-              <a:t>Stress, fatigue, or feeling overwhelmed can affect our focus. When focus drops, safety risks increase. Mental well-being is just as important as physical safety.</a:t>
-            </a:r>
-          </a:p>
-        </p:txBody>
-      </p:sp>
-      <p:sp>
-        <p:nvSpPr>
-          <p:cNvPr id="14" name="Rounded Rectangle 13"/>
-          <p:cNvSpPr/>
-          <p:nvPr/>
-        </p:nvSpPr>
-        <p:spPr>
-          <a:xfrm>
-            <a:off x="4343400" y="2834640"/>
-            <a:ext cx="3291840" cy="3200400"/>
-          </a:xfrm>
-          <a:prstGeom prst="roundRect">
-            <a:avLst>
-              <a:gd name="adj" fmla="val 5000"/>
-            </a:avLst>
-          </a:prstGeom>
           <a:solidFill>
-            <a:srgbClr val="103D52"/>
+            <a:srgbClr val="0000CC"/>
           </a:solidFill>
-          <a:ln w="12700">
-            <a:solidFill>
-              <a:srgbClr val="1A5A72"/>
-            </a:solidFill>
+          <a:ln>
+            <a:noFill/>
           </a:ln>
         </p:spPr>
         <p:style>
@@ -3665,23 +3747,23 @@
       </p:sp>
       <p:sp>
         <p:nvSpPr>
-          <p:cNvPr id="15" name="Rectangle 14"/>
+          <p:cNvPr id="3" name="Rounded Rectangle 2"/>
           <p:cNvSpPr/>
           <p:nvPr/>
         </p:nvSpPr>
         <p:spPr>
           <a:xfrm>
-            <a:off x="4480560" y="2944368"/>
-            <a:ext cx="3017520" cy="45720"/>
-          </a:xfrm>
-          <a:prstGeom prst="rect">
-            <a:avLst/>
-          </a:prstGeom>
-          <a:solidFill>
-            <a:srgbClr val="2ECC71"/>
-          </a:solidFill>
-          <a:ln>
-            <a:noFill/>
+            <a:off x="365760" y="365760"/>
+            <a:ext cx="3291840" cy="1188720"/>
+          </a:xfrm>
+          <a:prstGeom prst="roundRect">
+            <a:avLst/>
+          </a:prstGeom>
+          <a:noFill/>
+          <a:ln w="38100">
+            <a:solidFill>
+              <a:srgbClr val="FFFFFF"/>
+            </a:solidFill>
           </a:ln>
         </p:spPr>
         <p:style>
@@ -3702,29 +3784,38 @@
           <a:bodyPr rtlCol="0" anchor="ctr"/>
           <a:lstStyle/>
           <a:p>
-            <a:pPr algn="ctr"/>
-          </a:p>
-        </p:txBody>
-      </p:sp>
-      <p:sp>
-        <p:nvSpPr>
-          <p:cNvPr id="16" name="Oval 15"/>
+            <a:pPr algn="ctr">
+              <a:defRPr sz="2800" b="1">
+                <a:solidFill>
+                  <a:srgbClr val="FFFFFF"/>
+                </a:solidFill>
+              </a:defRPr>
+            </a:pPr>
+            <a:r>
+              <a:t>Safe Moment</a:t>
+            </a:r>
+          </a:p>
+        </p:txBody>
+      </p:sp>
+      <p:sp>
+        <p:nvSpPr>
+          <p:cNvPr id="4" name="Isosceles Triangle 3"/>
           <p:cNvSpPr/>
           <p:nvPr/>
         </p:nvSpPr>
         <p:spPr>
-          <a:xfrm>
-            <a:off x="4526280" y="3200400"/>
-            <a:ext cx="594360" cy="594360"/>
-          </a:xfrm>
-          <a:prstGeom prst="ellipse">
-            <a:avLst/>
-          </a:prstGeom>
-          <a:solidFill>
-            <a:srgbClr val="2ECC71"/>
-          </a:solidFill>
-          <a:ln>
-            <a:noFill/>
+          <a:xfrm rot="10800000">
+            <a:off x="1097280" y="1508760"/>
+            <a:ext cx="457200" cy="365760"/>
+          </a:xfrm>
+          <a:prstGeom prst="triangle">
+            <a:avLst/>
+          </a:prstGeom>
+          <a:noFill/>
+          <a:ln w="38100">
+            <a:solidFill>
+              <a:srgbClr val="FFFFFF"/>
+            </a:solidFill>
           </a:ln>
         </p:spPr>
         <p:style>
@@ -3742,115 +3833,31 @@
           </a:fontRef>
         </p:style>
         <p:txBody>
-          <a:bodyPr rtlCol="0" anchor="ctr" wrap="none"/>
-          <a:lstStyle/>
-          <a:p>
-            <a:pPr algn="ctr">
-              <a:defRPr sz="2200"/>
-            </a:pPr>
-            <a:r>
-              <a:t>🌱</a:t>
-            </a:r>
-          </a:p>
-        </p:txBody>
-      </p:sp>
-      <p:sp>
-        <p:nvSpPr>
-          <p:cNvPr id="17" name="TextBox 16"/>
-          <p:cNvSpPr txBox="1"/>
-          <p:nvPr/>
-        </p:nvSpPr>
-        <p:spPr>
-          <a:xfrm>
-            <a:off x="5257800" y="3200400"/>
-            <a:ext cx="2194560" cy="502920"/>
-          </a:xfrm>
-          <a:prstGeom prst="rect">
+          <a:bodyPr rtlCol="0" anchor="ctr"/>
+          <a:lstStyle/>
+          <a:p>
+            <a:pPr algn="ctr"/>
+          </a:p>
+        </p:txBody>
+      </p:sp>
+      <p:sp>
+        <p:nvSpPr>
+          <p:cNvPr id="5" name="Isosceles Triangle 4"/>
+          <p:cNvSpPr/>
+          <p:nvPr/>
+        </p:nvSpPr>
+        <p:spPr>
+          <a:xfrm>
+            <a:off x="457200" y="5120640"/>
+            <a:ext cx="822960" cy="731520"/>
+          </a:xfrm>
+          <a:prstGeom prst="triangle">
             <a:avLst/>
           </a:prstGeom>
           <a:noFill/>
-        </p:spPr>
-        <p:txBody>
-          <a:bodyPr wrap="square">
-            <a:spAutoFit/>
-          </a:bodyPr>
-          <a:lstStyle/>
-          <a:p>
-            <a:pPr algn="l">
-              <a:defRPr sz="1400" b="1">
-                <a:solidFill>
-                  <a:srgbClr val="2ECC71"/>
-                </a:solidFill>
-                <a:latin typeface="Calibri"/>
-              </a:defRPr>
-            </a:pPr>
-            <a:r>
-              <a:t>SMALL STEPS, BIG DIFFERENCE</a:t>
-            </a:r>
-          </a:p>
-        </p:txBody>
-      </p:sp>
-      <p:sp>
-        <p:nvSpPr>
-          <p:cNvPr id="18" name="TextBox 17"/>
-          <p:cNvSpPr txBox="1"/>
-          <p:nvPr/>
-        </p:nvSpPr>
-        <p:spPr>
-          <a:xfrm>
-            <a:off x="4572000" y="3931920"/>
-            <a:ext cx="2834640" cy="1920240"/>
-          </a:xfrm>
-          <a:prstGeom prst="rect">
-            <a:avLst/>
-          </a:prstGeom>
-          <a:noFill/>
-        </p:spPr>
-        <p:txBody>
-          <a:bodyPr wrap="square">
-            <a:spAutoFit/>
-          </a:bodyPr>
-          <a:lstStyle/>
-          <a:p>
-            <a:pPr algn="l">
-              <a:lnSpc>
-                <a:spcPts val="2000"/>
-              </a:lnSpc>
-              <a:defRPr sz="1300">
-                <a:solidFill>
-                  <a:srgbClr val="D5E8EF"/>
-                </a:solidFill>
-                <a:latin typeface="Calibri"/>
-              </a:defRPr>
-            </a:pPr>
-            <a:r>
-              <a:t>Take a short walk. Step outside for sunlight. Pause to reset your mind. These small actions improve mood and concentration throughout the day.</a:t>
-            </a:r>
-          </a:p>
-        </p:txBody>
-      </p:sp>
-      <p:sp>
-        <p:nvSpPr>
-          <p:cNvPr id="19" name="Rounded Rectangle 18"/>
-          <p:cNvSpPr/>
-          <p:nvPr/>
-        </p:nvSpPr>
-        <p:spPr>
-          <a:xfrm>
-            <a:off x="7955280" y="2834640"/>
-            <a:ext cx="3291840" cy="3200400"/>
-          </a:xfrm>
-          <a:prstGeom prst="roundRect">
-            <a:avLst>
-              <a:gd name="adj" fmla="val 5000"/>
-            </a:avLst>
-          </a:prstGeom>
-          <a:solidFill>
-            <a:srgbClr val="103D52"/>
-          </a:solidFill>
-          <a:ln w="12700">
+          <a:ln w="25400">
             <a:solidFill>
-              <a:srgbClr val="1A5A72"/>
+              <a:srgbClr val="FFFFFF"/>
             </a:solidFill>
           </a:ln>
         </p:spPr>
@@ -3878,20 +3885,55 @@
       </p:sp>
       <p:sp>
         <p:nvSpPr>
-          <p:cNvPr id="20" name="Rectangle 19"/>
+          <p:cNvPr id="6" name="TextBox 5"/>
+          <p:cNvSpPr txBox="1"/>
+          <p:nvPr/>
+        </p:nvSpPr>
+        <p:spPr>
+          <a:xfrm>
+            <a:off x="457200" y="5212080"/>
+            <a:ext cx="822960" cy="640080"/>
+          </a:xfrm>
+          <a:prstGeom prst="rect">
+            <a:avLst/>
+          </a:prstGeom>
+          <a:noFill/>
+        </p:spPr>
+        <p:txBody>
+          <a:bodyPr wrap="none">
+            <a:spAutoFit/>
+          </a:bodyPr>
+          <a:lstStyle/>
+          <a:p>
+            <a:pPr algn="ctr">
+              <a:defRPr sz="2400" b="1">
+                <a:solidFill>
+                  <a:srgbClr val="FFFFFF"/>
+                </a:solidFill>
+              </a:defRPr>
+            </a:pPr>
+            <a:r>
+              <a:t>!</a:t>
+            </a:r>
+          </a:p>
+        </p:txBody>
+      </p:sp>
+      <p:sp>
+        <p:nvSpPr>
+          <p:cNvPr id="7" name="Rectangle 6"/>
           <p:cNvSpPr/>
           <p:nvPr/>
         </p:nvSpPr>
         <p:spPr>
           <a:xfrm>
-            <a:off x="8092440" y="2944368"/>
-            <a:ext cx="3017520" cy="45720"/>
+            <a:off x="457200" y="5989320"/>
+            <a:ext cx="3200400" cy="25400"/>
           </a:xfrm>
           <a:prstGeom prst="rect">
             <a:avLst/>
           </a:prstGeom>
           <a:solidFill>
-            <a:srgbClr val="3498DB"/>
+            <a:srgbClr val="FFFFFF"/>
           </a:solidFill>
           <a:ln>
             <a:noFill/>
@@ -3921,20 +3963,325 @@
       </p:sp>
       <p:sp>
         <p:nvSpPr>
-          <p:cNvPr id="21" name="Oval 20"/>
+          <p:cNvPr id="8" name="TextBox 7"/>
+          <p:cNvSpPr txBox="1"/>
+          <p:nvPr/>
+        </p:nvSpPr>
+        <p:spPr>
+          <a:xfrm>
+            <a:off x="457200" y="6126480"/>
+            <a:ext cx="1828800" cy="548640"/>
+          </a:xfrm>
+          <a:prstGeom prst="rect">
+            <a:avLst/>
+          </a:prstGeom>
+          <a:noFill/>
+        </p:spPr>
+        <p:txBody>
+          <a:bodyPr wrap="none">
+            <a:spAutoFit/>
+          </a:bodyPr>
+          <a:lstStyle/>
+          <a:p>
+            <a:pPr>
+              <a:defRPr sz="3200" b="1">
+                <a:solidFill>
+                  <a:srgbClr val="FFFFFF"/>
+                </a:solidFill>
+              </a:defRPr>
+            </a:pPr>
+            <a:r>
+              <a:t>slb</a:t>
+            </a:r>
+          </a:p>
+        </p:txBody>
+      </p:sp>
+      <p:sp>
+        <p:nvSpPr>
+          <p:cNvPr id="9" name="TextBox 8"/>
+          <p:cNvSpPr txBox="1"/>
+          <p:nvPr/>
+        </p:nvSpPr>
+        <p:spPr>
+          <a:xfrm>
+            <a:off x="4572000" y="457200"/>
+            <a:ext cx="7132320" cy="731520"/>
+          </a:xfrm>
+          <a:prstGeom prst="rect">
+            <a:avLst/>
+          </a:prstGeom>
+          <a:noFill/>
+        </p:spPr>
+        <p:txBody>
+          <a:bodyPr wrap="none">
+            <a:spAutoFit/>
+          </a:bodyPr>
+          <a:lstStyle/>
+          <a:p>
+            <a:pPr>
+              <a:defRPr sz="2800" b="1">
+                <a:solidFill>
+                  <a:srgbClr val="0000CC"/>
+                </a:solidFill>
+              </a:defRPr>
+            </a:pPr>
+            <a:r>
+              <a:t>Why Mental Health Is a Safety Issue</a:t>
+            </a:r>
+          </a:p>
+        </p:txBody>
+      </p:sp>
+      <p:sp>
+        <p:nvSpPr>
+          <p:cNvPr id="10" name="TextBox 9"/>
+          <p:cNvSpPr txBox="1"/>
+          <p:nvPr/>
+        </p:nvSpPr>
+        <p:spPr>
+          <a:xfrm>
+            <a:off x="4572000" y="1280160"/>
+            <a:ext cx="7132320" cy="5029200"/>
+          </a:xfrm>
+          <a:prstGeom prst="rect">
+            <a:avLst/>
+          </a:prstGeom>
+          <a:noFill/>
+        </p:spPr>
+        <p:txBody>
+          <a:bodyPr wrap="square">
+            <a:spAutoFit/>
+          </a:bodyPr>
+          <a:lstStyle/>
+          <a:p>
+            <a:pPr>
+              <a:spcBef>
+                <a:spcPts val="1400"/>
+              </a:spcBef>
+              <a:defRPr sz="1800" b="1">
+                <a:solidFill>
+                  <a:srgbClr val="333333"/>
+                </a:solidFill>
+              </a:defRPr>
+            </a:pPr>
+            <a:r>
+              <a:t>The Brain-Body Connection</a:t>
+            </a:r>
+          </a:p>
+          <a:p>
+            <a:pPr>
+              <a:spcBef>
+                <a:spcPts val="400"/>
+              </a:spcBef>
+              <a:defRPr sz="1500">
+                <a:solidFill>
+                  <a:srgbClr val="333333"/>
+                </a:solidFill>
+              </a:defRPr>
+            </a:pPr>
+            <a:r>
+              <a:t>- Fatigue, distraction &amp; emotional distress impair judgment like alcohol</a:t>
+            </a:r>
+          </a:p>
+          <a:p>
+            <a:pPr>
+              <a:spcBef>
+                <a:spcPts val="400"/>
+              </a:spcBef>
+              <a:defRPr sz="1500">
+                <a:solidFill>
+                  <a:srgbClr val="333333"/>
+                </a:solidFill>
+              </a:defRPr>
+            </a:pPr>
+            <a:r>
+              <a:t>- Workers with untreated depression have 2x higher injury rates</a:t>
+            </a:r>
+          </a:p>
+          <a:p>
+            <a:pPr>
+              <a:spcBef>
+                <a:spcPts val="400"/>
+              </a:spcBef>
+              <a:defRPr sz="1500">
+                <a:solidFill>
+                  <a:srgbClr val="333333"/>
+                </a:solidFill>
+              </a:defRPr>
+            </a:pPr>
+            <a:r>
+              <a:t>- Stress hormones reduce reaction time and narrow awareness</a:t>
+            </a:r>
+          </a:p>
+          <a:p>
+            <a:pPr>
+              <a:spcBef>
+                <a:spcPts val="400"/>
+              </a:spcBef>
+            </a:pPr>
+          </a:p>
+          <a:p>
+            <a:pPr>
+              <a:spcBef>
+                <a:spcPts val="1400"/>
+              </a:spcBef>
+              <a:defRPr sz="1800" b="1">
+                <a:solidFill>
+                  <a:srgbClr val="333333"/>
+                </a:solidFill>
+              </a:defRPr>
+            </a:pPr>
+            <a:r>
+              <a:t>The Hidden Hazard in Our Industry</a:t>
+            </a:r>
+          </a:p>
+          <a:p>
+            <a:pPr>
+              <a:spcBef>
+                <a:spcPts val="400"/>
+              </a:spcBef>
+              <a:defRPr sz="1500">
+                <a:solidFill>
+                  <a:srgbClr val="333333"/>
+                </a:solidFill>
+              </a:defRPr>
+            </a:pPr>
+            <a:r>
+              <a:t>- Isolation, long rotations, time away from family, high-pressure ops</a:t>
+            </a:r>
+          </a:p>
+          <a:p>
+            <a:pPr>
+              <a:spcBef>
+                <a:spcPts val="400"/>
+              </a:spcBef>
+              <a:defRPr sz="1500">
+                <a:solidFill>
+                  <a:srgbClr val="333333"/>
+                </a:solidFill>
+              </a:defRPr>
+            </a:pPr>
+            <a:r>
+              <a:t>- Struggling workers are less likely to speak up about physical hazards</a:t>
+            </a:r>
+          </a:p>
+          <a:p>
+            <a:pPr>
+              <a:spcBef>
+                <a:spcPts val="400"/>
+              </a:spcBef>
+              <a:defRPr sz="1500">
+                <a:solidFill>
+                  <a:srgbClr val="333333"/>
+                </a:solidFill>
+              </a:defRPr>
+            </a:pPr>
+            <a:r>
+              <a:t>- Suicide rates in construction &amp; extraction: 3-5x the national average</a:t>
+            </a:r>
+          </a:p>
+          <a:p>
+            <a:pPr>
+              <a:spcBef>
+                <a:spcPts val="400"/>
+              </a:spcBef>
+            </a:pPr>
+          </a:p>
+          <a:p>
+            <a:pPr>
+              <a:spcBef>
+                <a:spcPts val="1400"/>
+              </a:spcBef>
+              <a:defRPr sz="1800" b="1">
+                <a:solidFill>
+                  <a:srgbClr val="333333"/>
+                </a:solidFill>
+              </a:defRPr>
+            </a:pPr>
+            <a:r>
+              <a:t>It's Not "Soft" — It's Survival</a:t>
+            </a:r>
+          </a:p>
+          <a:p>
+            <a:pPr>
+              <a:spcBef>
+                <a:spcPts val="400"/>
+              </a:spcBef>
+              <a:defRPr sz="1500">
+                <a:solidFill>
+                  <a:srgbClr val="333333"/>
+                </a:solidFill>
+              </a:defRPr>
+            </a:pPr>
+            <a:r>
+              <a:t>- We wouldn't ignore a frayed wire or a cracked harness</a:t>
+            </a:r>
+          </a:p>
+          <a:p>
+            <a:pPr>
+              <a:spcBef>
+                <a:spcPts val="400"/>
+              </a:spcBef>
+              <a:defRPr sz="1500">
+                <a:solidFill>
+                  <a:srgbClr val="333333"/>
+                </a:solidFill>
+              </a:defRPr>
+            </a:pPr>
+            <a:r>
+              <a:t>- A struggling mind is an invisible but equally dangerous hazard</a:t>
+            </a:r>
+          </a:p>
+          <a:p>
+            <a:pPr>
+              <a:spcBef>
+                <a:spcPts val="400"/>
+              </a:spcBef>
+              <a:defRPr sz="1500">
+                <a:solidFill>
+                  <a:srgbClr val="333333"/>
+                </a:solidFill>
+              </a:defRPr>
+            </a:pPr>
+            <a:r>
+              <a:t>- Mental fitness IS operational fitness</a:t>
+            </a:r>
+          </a:p>
+        </p:txBody>
+      </p:sp>
+    </p:spTree>
+  </p:cSld>
+  <p:clrMapOvr>
+    <a:masterClrMapping/>
+  </p:clrMapOvr>
+</p:sld>
+</file>
+
+<file path=ppt/slides/slide3.xml><?xml version="1.0" encoding="utf-8"?>
+<p:sld xmlns:a="http://schemas.openxmlformats.org/drawingml/2006/main" xmlns:p="http://schemas.openxmlformats.org/presentationml/2006/main" xmlns:r="http://schemas.openxmlformats.org/officeDocument/2006/relationships">
+  <p:cSld>
+    <p:spTree>
+      <p:nvGrpSpPr>
+        <p:cNvPr id="1" name=""/>
+        <p:cNvGrpSpPr/>
+        <p:nvPr/>
+      </p:nvGrpSpPr>
+      <p:grpSpPr/>
+      <p:sp>
+        <p:nvSpPr>
+          <p:cNvPr id="2" name="Rectangle 1"/>
           <p:cNvSpPr/>
           <p:nvPr/>
         </p:nvSpPr>
         <p:spPr>
           <a:xfrm>
-            <a:off x="8138160" y="3200400"/>
-            <a:ext cx="594360" cy="594360"/>
-          </a:xfrm>
-          <a:prstGeom prst="ellipse">
+            <a:off x="0" y="0"/>
+            <a:ext cx="4114800" cy="6858000"/>
+          </a:xfrm>
+          <a:prstGeom prst="rect">
             <a:avLst/>
           </a:prstGeom>
           <a:solidFill>
-            <a:srgbClr val="3498DB"/>
+            <a:srgbClr val="0000CC"/>
           </a:solidFill>
           <a:ln>
             <a:noFill/>
@@ -3955,112 +4302,32 @@
           </a:fontRef>
         </p:style>
         <p:txBody>
-          <a:bodyPr rtlCol="0" anchor="ctr" wrap="none"/>
-          <a:lstStyle/>
-          <a:p>
-            <a:pPr algn="ctr">
-              <a:defRPr sz="2200"/>
-            </a:pPr>
-            <a:r>
-              <a:t>🤝</a:t>
-            </a:r>
-          </a:p>
-        </p:txBody>
-      </p:sp>
-      <p:sp>
-        <p:nvSpPr>
-          <p:cNvPr id="22" name="TextBox 21"/>
-          <p:cNvSpPr txBox="1"/>
-          <p:nvPr/>
-        </p:nvSpPr>
-        <p:spPr>
-          <a:xfrm>
-            <a:off x="8869680" y="3200400"/>
-            <a:ext cx="2194560" cy="502920"/>
-          </a:xfrm>
-          <a:prstGeom prst="rect">
+          <a:bodyPr rtlCol="0" anchor="ctr"/>
+          <a:lstStyle/>
+          <a:p>
+            <a:pPr algn="ctr"/>
+          </a:p>
+        </p:txBody>
+      </p:sp>
+      <p:sp>
+        <p:nvSpPr>
+          <p:cNvPr id="3" name="Rounded Rectangle 2"/>
+          <p:cNvSpPr/>
+          <p:nvPr/>
+        </p:nvSpPr>
+        <p:spPr>
+          <a:xfrm>
+            <a:off x="365760" y="365760"/>
+            <a:ext cx="3291840" cy="1188720"/>
+          </a:xfrm>
+          <a:prstGeom prst="roundRect">
             <a:avLst/>
           </a:prstGeom>
           <a:noFill/>
-        </p:spPr>
-        <p:txBody>
-          <a:bodyPr wrap="square">
-            <a:spAutoFit/>
-          </a:bodyPr>
-          <a:lstStyle/>
-          <a:p>
-            <a:pPr algn="l">
-              <a:defRPr sz="1400" b="1">
-                <a:solidFill>
-                  <a:srgbClr val="3498DB"/>
-                </a:solidFill>
-                <a:latin typeface="Calibri"/>
-              </a:defRPr>
-            </a:pPr>
-            <a:r>
-              <a:t>SUPPORT EACH OTHER</a:t>
-            </a:r>
-          </a:p>
-        </p:txBody>
-      </p:sp>
-      <p:sp>
-        <p:nvSpPr>
-          <p:cNvPr id="23" name="TextBox 22"/>
-          <p:cNvSpPr txBox="1"/>
-          <p:nvPr/>
-        </p:nvSpPr>
-        <p:spPr>
-          <a:xfrm>
-            <a:off x="8183880" y="3931920"/>
-            <a:ext cx="2834640" cy="1920240"/>
-          </a:xfrm>
-          <a:prstGeom prst="rect">
-            <a:avLst/>
-          </a:prstGeom>
-          <a:noFill/>
-        </p:spPr>
-        <p:txBody>
-          <a:bodyPr wrap="square">
-            <a:spAutoFit/>
-          </a:bodyPr>
-          <a:lstStyle/>
-          <a:p>
-            <a:pPr algn="l">
-              <a:lnSpc>
-                <a:spcPts val="2000"/>
-              </a:lnSpc>
-              <a:defRPr sz="1300">
-                <a:solidFill>
-                  <a:srgbClr val="D5E8EF"/>
-                </a:solidFill>
-                <a:latin typeface="Calibri"/>
-              </a:defRPr>
-            </a:pPr>
-            <a:r>
-              <a:t>If you're feeling stressed, take a break, talk to a colleague, or reach out for support. Supporting each other helps us stay focused, work better, and stay safe.</a:t>
-            </a:r>
-          </a:p>
-        </p:txBody>
-      </p:sp>
-      <p:sp>
-        <p:nvSpPr>
-          <p:cNvPr id="24" name="Oval 23"/>
-          <p:cNvSpPr/>
-          <p:nvPr/>
-        </p:nvSpPr>
-        <p:spPr>
-          <a:xfrm>
-            <a:off x="10515600" y="274320"/>
-            <a:ext cx="1097280" cy="1097280"/>
-          </a:xfrm>
-          <a:prstGeom prst="ellipse">
-            <a:avLst/>
-          </a:prstGeom>
-          <a:solidFill>
-            <a:srgbClr val="143E50"/>
-          </a:solidFill>
-          <a:ln>
-            <a:noFill/>
+          <a:ln w="38100">
+            <a:solidFill>
+              <a:srgbClr val="FFFFFF"/>
+            </a:solidFill>
           </a:ln>
         </p:spPr>
         <p:style>
@@ -4081,29 +4348,38 @@
           <a:bodyPr rtlCol="0" anchor="ctr"/>
           <a:lstStyle/>
           <a:p>
-            <a:pPr algn="ctr"/>
-          </a:p>
-        </p:txBody>
-      </p:sp>
-      <p:sp>
-        <p:nvSpPr>
-          <p:cNvPr id="25" name="Oval 24"/>
+            <a:pPr algn="ctr">
+              <a:defRPr sz="2800" b="1">
+                <a:solidFill>
+                  <a:srgbClr val="FFFFFF"/>
+                </a:solidFill>
+              </a:defRPr>
+            </a:pPr>
+            <a:r>
+              <a:t>Safe Moment</a:t>
+            </a:r>
+          </a:p>
+        </p:txBody>
+      </p:sp>
+      <p:sp>
+        <p:nvSpPr>
+          <p:cNvPr id="4" name="Isosceles Triangle 3"/>
           <p:cNvSpPr/>
           <p:nvPr/>
         </p:nvSpPr>
         <p:spPr>
-          <a:xfrm>
-            <a:off x="10972800" y="731520"/>
-            <a:ext cx="640080" cy="640080"/>
-          </a:xfrm>
-          <a:prstGeom prst="ellipse">
-            <a:avLst/>
-          </a:prstGeom>
-          <a:solidFill>
-            <a:srgbClr val="123848"/>
-          </a:solidFill>
-          <a:ln>
-            <a:noFill/>
+          <a:xfrm rot="10800000">
+            <a:off x="1097280" y="1508760"/>
+            <a:ext cx="457200" cy="365760"/>
+          </a:xfrm>
+          <a:prstGeom prst="triangle">
+            <a:avLst/>
+          </a:prstGeom>
+          <a:noFill/>
+          <a:ln w="38100">
+            <a:solidFill>
+              <a:srgbClr val="FFFFFF"/>
+            </a:solidFill>
           </a:ln>
         </p:spPr>
         <p:style>
@@ -4130,14 +4406,952 @@
       </p:sp>
       <p:sp>
         <p:nvSpPr>
-          <p:cNvPr id="26" name="TextBox 25"/>
+          <p:cNvPr id="5" name="Isosceles Triangle 4"/>
+          <p:cNvSpPr/>
+          <p:nvPr/>
+        </p:nvSpPr>
+        <p:spPr>
+          <a:xfrm>
+            <a:off x="457200" y="5120640"/>
+            <a:ext cx="822960" cy="731520"/>
+          </a:xfrm>
+          <a:prstGeom prst="triangle">
+            <a:avLst/>
+          </a:prstGeom>
+          <a:noFill/>
+          <a:ln w="25400">
+            <a:solidFill>
+              <a:srgbClr val="FFFFFF"/>
+            </a:solidFill>
+          </a:ln>
+        </p:spPr>
+        <p:style>
+          <a:lnRef idx="1">
+            <a:schemeClr val="accent1"/>
+          </a:lnRef>
+          <a:fillRef idx="3">
+            <a:schemeClr val="accent1"/>
+          </a:fillRef>
+          <a:effectRef idx="2">
+            <a:schemeClr val="accent1"/>
+          </a:effectRef>
+          <a:fontRef idx="minor">
+            <a:schemeClr val="lt1"/>
+          </a:fontRef>
+        </p:style>
+        <p:txBody>
+          <a:bodyPr rtlCol="0" anchor="ctr"/>
+          <a:lstStyle/>
+          <a:p>
+            <a:pPr algn="ctr"/>
+          </a:p>
+        </p:txBody>
+      </p:sp>
+      <p:sp>
+        <p:nvSpPr>
+          <p:cNvPr id="6" name="TextBox 5"/>
           <p:cNvSpPr txBox="1"/>
           <p:nvPr/>
         </p:nvSpPr>
         <p:spPr>
           <a:xfrm>
-            <a:off x="731520" y="6126480"/>
-            <a:ext cx="10515600" cy="365760"/>
+            <a:off x="457200" y="5212080"/>
+            <a:ext cx="822960" cy="640080"/>
+          </a:xfrm>
+          <a:prstGeom prst="rect">
+            <a:avLst/>
+          </a:prstGeom>
+          <a:noFill/>
+        </p:spPr>
+        <p:txBody>
+          <a:bodyPr wrap="none">
+            <a:spAutoFit/>
+          </a:bodyPr>
+          <a:lstStyle/>
+          <a:p>
+            <a:pPr algn="ctr">
+              <a:defRPr sz="2400" b="1">
+                <a:solidFill>
+                  <a:srgbClr val="FFFFFF"/>
+                </a:solidFill>
+              </a:defRPr>
+            </a:pPr>
+            <a:r>
+              <a:t>!</a:t>
+            </a:r>
+          </a:p>
+        </p:txBody>
+      </p:sp>
+      <p:sp>
+        <p:nvSpPr>
+          <p:cNvPr id="7" name="Rectangle 6"/>
+          <p:cNvSpPr/>
+          <p:nvPr/>
+        </p:nvSpPr>
+        <p:spPr>
+          <a:xfrm>
+            <a:off x="457200" y="5989320"/>
+            <a:ext cx="3200400" cy="25400"/>
+          </a:xfrm>
+          <a:prstGeom prst="rect">
+            <a:avLst/>
+          </a:prstGeom>
+          <a:solidFill>
+            <a:srgbClr val="FFFFFF"/>
+          </a:solidFill>
+          <a:ln>
+            <a:noFill/>
+          </a:ln>
+        </p:spPr>
+        <p:style>
+          <a:lnRef idx="1">
+            <a:schemeClr val="accent1"/>
+          </a:lnRef>
+          <a:fillRef idx="3">
+            <a:schemeClr val="accent1"/>
+          </a:fillRef>
+          <a:effectRef idx="2">
+            <a:schemeClr val="accent1"/>
+          </a:effectRef>
+          <a:fontRef idx="minor">
+            <a:schemeClr val="lt1"/>
+          </a:fontRef>
+        </p:style>
+        <p:txBody>
+          <a:bodyPr rtlCol="0" anchor="ctr"/>
+          <a:lstStyle/>
+          <a:p>
+            <a:pPr algn="ctr"/>
+          </a:p>
+        </p:txBody>
+      </p:sp>
+      <p:sp>
+        <p:nvSpPr>
+          <p:cNvPr id="8" name="TextBox 7"/>
+          <p:cNvSpPr txBox="1"/>
+          <p:nvPr/>
+        </p:nvSpPr>
+        <p:spPr>
+          <a:xfrm>
+            <a:off x="457200" y="6126480"/>
+            <a:ext cx="1828800" cy="548640"/>
+          </a:xfrm>
+          <a:prstGeom prst="rect">
+            <a:avLst/>
+          </a:prstGeom>
+          <a:noFill/>
+        </p:spPr>
+        <p:txBody>
+          <a:bodyPr wrap="none">
+            <a:spAutoFit/>
+          </a:bodyPr>
+          <a:lstStyle/>
+          <a:p>
+            <a:pPr>
+              <a:defRPr sz="3200" b="1">
+                <a:solidFill>
+                  <a:srgbClr val="FFFFFF"/>
+                </a:solidFill>
+              </a:defRPr>
+            </a:pPr>
+            <a:r>
+              <a:t>slb</a:t>
+            </a:r>
+          </a:p>
+        </p:txBody>
+      </p:sp>
+      <p:sp>
+        <p:nvSpPr>
+          <p:cNvPr id="9" name="TextBox 8"/>
+          <p:cNvSpPr txBox="1"/>
+          <p:nvPr/>
+        </p:nvSpPr>
+        <p:spPr>
+          <a:xfrm>
+            <a:off x="4572000" y="457200"/>
+            <a:ext cx="7132320" cy="731520"/>
+          </a:xfrm>
+          <a:prstGeom prst="rect">
+            <a:avLst/>
+          </a:prstGeom>
+          <a:noFill/>
+        </p:spPr>
+        <p:txBody>
+          <a:bodyPr wrap="none">
+            <a:spAutoFit/>
+          </a:bodyPr>
+          <a:lstStyle/>
+          <a:p>
+            <a:pPr>
+              <a:defRPr sz="2800" b="1">
+                <a:solidFill>
+                  <a:srgbClr val="0000CC"/>
+                </a:solidFill>
+              </a:defRPr>
+            </a:pPr>
+            <a:r>
+              <a:t>Recognizing the Warning Signs</a:t>
+            </a:r>
+          </a:p>
+        </p:txBody>
+      </p:sp>
+      <p:sp>
+        <p:nvSpPr>
+          <p:cNvPr id="10" name="Rounded Rectangle 9"/>
+          <p:cNvSpPr/>
+          <p:nvPr/>
+        </p:nvSpPr>
+        <p:spPr>
+          <a:xfrm>
+            <a:off x="4572000" y="1371600"/>
+            <a:ext cx="3383280" cy="4754880"/>
+          </a:xfrm>
+          <a:prstGeom prst="roundRect">
+            <a:avLst/>
+          </a:prstGeom>
+          <a:solidFill>
+            <a:srgbClr val="FDF0F0"/>
+          </a:solidFill>
+          <a:ln w="19050">
+            <a:solidFill>
+              <a:srgbClr val="CC3333"/>
+            </a:solidFill>
+          </a:ln>
+        </p:spPr>
+        <p:style>
+          <a:lnRef idx="1">
+            <a:schemeClr val="accent1"/>
+          </a:lnRef>
+          <a:fillRef idx="3">
+            <a:schemeClr val="accent1"/>
+          </a:fillRef>
+          <a:effectRef idx="2">
+            <a:schemeClr val="accent1"/>
+          </a:effectRef>
+          <a:fontRef idx="minor">
+            <a:schemeClr val="lt1"/>
+          </a:fontRef>
+        </p:style>
+        <p:txBody>
+          <a:bodyPr rtlCol="0" anchor="ctr" wrap="square"/>
+          <a:lstStyle/>
+          <a:p>
+            <a:pPr algn="ctr">
+              <a:defRPr sz="1600" b="1">
+                <a:solidFill>
+                  <a:srgbClr val="CC3333"/>
+                </a:solidFill>
+              </a:defRPr>
+            </a:pPr>
+            <a:r>
+              <a:t>IN YOURSELF</a:t>
+            </a:r>
+          </a:p>
+          <a:p>
+            <a:pPr>
+              <a:spcBef>
+                <a:spcPts val="600"/>
+              </a:spcBef>
+              <a:defRPr sz="1300">
+                <a:solidFill>
+                  <a:srgbClr val="333333"/>
+                </a:solidFill>
+              </a:defRPr>
+            </a:pPr>
+            <a:r>
+              <a:t>  Persistent dread about going to work</a:t>
+            </a:r>
+          </a:p>
+          <a:p>
+            <a:pPr>
+              <a:spcBef>
+                <a:spcPts val="600"/>
+              </a:spcBef>
+              <a:defRPr sz="1300">
+                <a:solidFill>
+                  <a:srgbClr val="333333"/>
+                </a:solidFill>
+              </a:defRPr>
+            </a:pPr>
+            <a:r>
+              <a:t>  Snapping at coworkers over small things</a:t>
+            </a:r>
+          </a:p>
+          <a:p>
+            <a:pPr>
+              <a:spcBef>
+                <a:spcPts val="600"/>
+              </a:spcBef>
+              <a:defRPr sz="1300">
+                <a:solidFill>
+                  <a:srgbClr val="333333"/>
+                </a:solidFill>
+              </a:defRPr>
+            </a:pPr>
+            <a:r>
+              <a:t>  Difficulty concentrating or making decisions</a:t>
+            </a:r>
+          </a:p>
+          <a:p>
+            <a:pPr>
+              <a:spcBef>
+                <a:spcPts val="600"/>
+              </a:spcBef>
+              <a:defRPr sz="1300">
+                <a:solidFill>
+                  <a:srgbClr val="333333"/>
+                </a:solidFill>
+              </a:defRPr>
+            </a:pPr>
+            <a:r>
+              <a:t>  Using substances to 'unwind' daily</a:t>
+            </a:r>
+          </a:p>
+          <a:p>
+            <a:pPr>
+              <a:spcBef>
+                <a:spcPts val="600"/>
+              </a:spcBef>
+              <a:defRPr sz="1300">
+                <a:solidFill>
+                  <a:srgbClr val="333333"/>
+                </a:solidFill>
+              </a:defRPr>
+            </a:pPr>
+            <a:r>
+              <a:t>  Headaches, chest tightness, stomach issues</a:t>
+            </a:r>
+          </a:p>
+          <a:p>
+            <a:pPr>
+              <a:spcBef>
+                <a:spcPts val="600"/>
+              </a:spcBef>
+              <a:defRPr sz="1300">
+                <a:solidFill>
+                  <a:srgbClr val="333333"/>
+                </a:solidFill>
+              </a:defRPr>
+            </a:pPr>
+            <a:r>
+              <a:t>  Feeling numb or 'going through the motions'</a:t>
+            </a:r>
+          </a:p>
+          <a:p>
+            <a:pPr>
+              <a:spcBef>
+                <a:spcPts val="600"/>
+              </a:spcBef>
+              <a:defRPr sz="1300">
+                <a:solidFill>
+                  <a:srgbClr val="333333"/>
+                </a:solidFill>
+              </a:defRPr>
+            </a:pPr>
+            <a:r>
+              <a:t>  Sleep problems — too much or too little</a:t>
+            </a:r>
+          </a:p>
+          <a:p>
+            <a:pPr>
+              <a:spcBef>
+                <a:spcPts val="600"/>
+              </a:spcBef>
+              <a:defRPr sz="1300">
+                <a:solidFill>
+                  <a:srgbClr val="333333"/>
+                </a:solidFill>
+              </a:defRPr>
+            </a:pPr>
+            <a:r>
+              <a:t>  Withdrawing from people you usually enjoy</a:t>
+            </a:r>
+          </a:p>
+        </p:txBody>
+      </p:sp>
+      <p:sp>
+        <p:nvSpPr>
+          <p:cNvPr id="11" name="Rounded Rectangle 10"/>
+          <p:cNvSpPr/>
+          <p:nvPr/>
+        </p:nvSpPr>
+        <p:spPr>
+          <a:xfrm>
+            <a:off x="8321040" y="1371600"/>
+            <a:ext cx="3383280" cy="4754880"/>
+          </a:xfrm>
+          <a:prstGeom prst="roundRect">
+            <a:avLst/>
+          </a:prstGeom>
+          <a:solidFill>
+            <a:srgbClr val="E8F5E9"/>
+          </a:solidFill>
+          <a:ln w="19050">
+            <a:solidFill>
+              <a:srgbClr val="2E7D32"/>
+            </a:solidFill>
+          </a:ln>
+        </p:spPr>
+        <p:style>
+          <a:lnRef idx="1">
+            <a:schemeClr val="accent1"/>
+          </a:lnRef>
+          <a:fillRef idx="3">
+            <a:schemeClr val="accent1"/>
+          </a:fillRef>
+          <a:effectRef idx="2">
+            <a:schemeClr val="accent1"/>
+          </a:effectRef>
+          <a:fontRef idx="minor">
+            <a:schemeClr val="lt1"/>
+          </a:fontRef>
+        </p:style>
+        <p:txBody>
+          <a:bodyPr rtlCol="0" anchor="ctr" wrap="square"/>
+          <a:lstStyle/>
+          <a:p>
+            <a:pPr algn="ctr">
+              <a:defRPr sz="1600" b="1">
+                <a:solidFill>
+                  <a:srgbClr val="2E7D32"/>
+                </a:solidFill>
+              </a:defRPr>
+            </a:pPr>
+            <a:r>
+              <a:t>IN A COWORKER</a:t>
+            </a:r>
+          </a:p>
+          <a:p>
+            <a:pPr>
+              <a:spcBef>
+                <a:spcPts val="600"/>
+              </a:spcBef>
+              <a:defRPr sz="1300">
+                <a:solidFill>
+                  <a:srgbClr val="333333"/>
+                </a:solidFill>
+              </a:defRPr>
+            </a:pPr>
+            <a:r>
+              <a:t>  Sudden change in personality or mood</a:t>
+            </a:r>
+          </a:p>
+          <a:p>
+            <a:pPr>
+              <a:spcBef>
+                <a:spcPts val="600"/>
+              </a:spcBef>
+              <a:defRPr sz="1300">
+                <a:solidFill>
+                  <a:srgbClr val="333333"/>
+                </a:solidFill>
+              </a:defRPr>
+            </a:pPr>
+            <a:r>
+              <a:t>  Increased absences or always late</a:t>
+            </a:r>
+          </a:p>
+          <a:p>
+            <a:pPr>
+              <a:spcBef>
+                <a:spcPts val="600"/>
+              </a:spcBef>
+              <a:defRPr sz="1300">
+                <a:solidFill>
+                  <a:srgbClr val="333333"/>
+                </a:solidFill>
+              </a:defRPr>
+            </a:pPr>
+            <a:r>
+              <a:t>  Uncharacteristic mistakes or near-misses</a:t>
+            </a:r>
+          </a:p>
+          <a:p>
+            <a:pPr>
+              <a:spcBef>
+                <a:spcPts val="600"/>
+              </a:spcBef>
+              <a:defRPr sz="1300">
+                <a:solidFill>
+                  <a:srgbClr val="333333"/>
+                </a:solidFill>
+              </a:defRPr>
+            </a:pPr>
+            <a:r>
+              <a:t>  Pulling away from team conversations</a:t>
+            </a:r>
+          </a:p>
+          <a:p>
+            <a:pPr>
+              <a:spcBef>
+                <a:spcPts val="600"/>
+              </a:spcBef>
+              <a:defRPr sz="1300">
+                <a:solidFill>
+                  <a:srgbClr val="333333"/>
+                </a:solidFill>
+              </a:defRPr>
+            </a:pPr>
+            <a:r>
+              <a:t>  Comments like 'what's the point'</a:t>
+            </a:r>
+          </a:p>
+          <a:p>
+            <a:pPr>
+              <a:spcBef>
+                <a:spcPts val="600"/>
+              </a:spcBef>
+              <a:defRPr sz="1300">
+                <a:solidFill>
+                  <a:srgbClr val="333333"/>
+                </a:solidFill>
+              </a:defRPr>
+            </a:pPr>
+            <a:r>
+              <a:t>  Visible exhaustion beyond normal fatigue</a:t>
+            </a:r>
+          </a:p>
+          <a:p>
+            <a:pPr>
+              <a:spcBef>
+                <a:spcPts val="600"/>
+              </a:spcBef>
+              <a:defRPr sz="1300">
+                <a:solidFill>
+                  <a:srgbClr val="333333"/>
+                </a:solidFill>
+              </a:defRPr>
+            </a:pPr>
+            <a:r>
+              <a:t>  Talking about feeling trapped or hopeless</a:t>
+            </a:r>
+          </a:p>
+          <a:p>
+            <a:pPr>
+              <a:spcBef>
+                <a:spcPts val="600"/>
+              </a:spcBef>
+              <a:defRPr sz="1300">
+                <a:solidFill>
+                  <a:srgbClr val="333333"/>
+                </a:solidFill>
+              </a:defRPr>
+            </a:pPr>
+            <a:r>
+              <a:t>  Giving away personal items (critical red flag)</a:t>
+            </a:r>
+          </a:p>
+        </p:txBody>
+      </p:sp>
+    </p:spTree>
+  </p:cSld>
+  <p:clrMapOvr>
+    <a:masterClrMapping/>
+  </p:clrMapOvr>
+</p:sld>
+</file>
+
+<file path=ppt/slides/slide4.xml><?xml version="1.0" encoding="utf-8"?>
+<p:sld xmlns:a="http://schemas.openxmlformats.org/drawingml/2006/main" xmlns:p="http://schemas.openxmlformats.org/presentationml/2006/main" xmlns:r="http://schemas.openxmlformats.org/officeDocument/2006/relationships">
+  <p:cSld>
+    <p:spTree>
+      <p:nvGrpSpPr>
+        <p:cNvPr id="1" name=""/>
+        <p:cNvGrpSpPr/>
+        <p:nvPr/>
+      </p:nvGrpSpPr>
+      <p:grpSpPr/>
+      <p:sp>
+        <p:nvSpPr>
+          <p:cNvPr id="2" name="Rectangle 1"/>
+          <p:cNvSpPr/>
+          <p:nvPr/>
+        </p:nvSpPr>
+        <p:spPr>
+          <a:xfrm>
+            <a:off x="0" y="0"/>
+            <a:ext cx="4114800" cy="6858000"/>
+          </a:xfrm>
+          <a:prstGeom prst="rect">
+            <a:avLst/>
+          </a:prstGeom>
+          <a:solidFill>
+            <a:srgbClr val="0000CC"/>
+          </a:solidFill>
+          <a:ln>
+            <a:noFill/>
+          </a:ln>
+        </p:spPr>
+        <p:style>
+          <a:lnRef idx="1">
+            <a:schemeClr val="accent1"/>
+          </a:lnRef>
+          <a:fillRef idx="3">
+            <a:schemeClr val="accent1"/>
+          </a:fillRef>
+          <a:effectRef idx="2">
+            <a:schemeClr val="accent1"/>
+          </a:effectRef>
+          <a:fontRef idx="minor">
+            <a:schemeClr val="lt1"/>
+          </a:fontRef>
+        </p:style>
+        <p:txBody>
+          <a:bodyPr rtlCol="0" anchor="ctr"/>
+          <a:lstStyle/>
+          <a:p>
+            <a:pPr algn="ctr"/>
+          </a:p>
+        </p:txBody>
+      </p:sp>
+      <p:sp>
+        <p:nvSpPr>
+          <p:cNvPr id="3" name="Rounded Rectangle 2"/>
+          <p:cNvSpPr/>
+          <p:nvPr/>
+        </p:nvSpPr>
+        <p:spPr>
+          <a:xfrm>
+            <a:off x="365760" y="365760"/>
+            <a:ext cx="3291840" cy="1188720"/>
+          </a:xfrm>
+          <a:prstGeom prst="roundRect">
+            <a:avLst/>
+          </a:prstGeom>
+          <a:noFill/>
+          <a:ln w="38100">
+            <a:solidFill>
+              <a:srgbClr val="FFFFFF"/>
+            </a:solidFill>
+          </a:ln>
+        </p:spPr>
+        <p:style>
+          <a:lnRef idx="1">
+            <a:schemeClr val="accent1"/>
+          </a:lnRef>
+          <a:fillRef idx="3">
+            <a:schemeClr val="accent1"/>
+          </a:fillRef>
+          <a:effectRef idx="2">
+            <a:schemeClr val="accent1"/>
+          </a:effectRef>
+          <a:fontRef idx="minor">
+            <a:schemeClr val="lt1"/>
+          </a:fontRef>
+        </p:style>
+        <p:txBody>
+          <a:bodyPr rtlCol="0" anchor="ctr"/>
+          <a:lstStyle/>
+          <a:p>
+            <a:pPr algn="ctr">
+              <a:defRPr sz="2800" b="1">
+                <a:solidFill>
+                  <a:srgbClr val="FFFFFF"/>
+                </a:solidFill>
+              </a:defRPr>
+            </a:pPr>
+            <a:r>
+              <a:t>Safe Moment</a:t>
+            </a:r>
+          </a:p>
+        </p:txBody>
+      </p:sp>
+      <p:sp>
+        <p:nvSpPr>
+          <p:cNvPr id="4" name="Isosceles Triangle 3"/>
+          <p:cNvSpPr/>
+          <p:nvPr/>
+        </p:nvSpPr>
+        <p:spPr>
+          <a:xfrm rot="10800000">
+            <a:off x="1097280" y="1508760"/>
+            <a:ext cx="457200" cy="365760"/>
+          </a:xfrm>
+          <a:prstGeom prst="triangle">
+            <a:avLst/>
+          </a:prstGeom>
+          <a:noFill/>
+          <a:ln w="38100">
+            <a:solidFill>
+              <a:srgbClr val="FFFFFF"/>
+            </a:solidFill>
+          </a:ln>
+        </p:spPr>
+        <p:style>
+          <a:lnRef idx="1">
+            <a:schemeClr val="accent1"/>
+          </a:lnRef>
+          <a:fillRef idx="3">
+            <a:schemeClr val="accent1"/>
+          </a:fillRef>
+          <a:effectRef idx="2">
+            <a:schemeClr val="accent1"/>
+          </a:effectRef>
+          <a:fontRef idx="minor">
+            <a:schemeClr val="lt1"/>
+          </a:fontRef>
+        </p:style>
+        <p:txBody>
+          <a:bodyPr rtlCol="0" anchor="ctr"/>
+          <a:lstStyle/>
+          <a:p>
+            <a:pPr algn="ctr"/>
+          </a:p>
+        </p:txBody>
+      </p:sp>
+      <p:sp>
+        <p:nvSpPr>
+          <p:cNvPr id="5" name="Isosceles Triangle 4"/>
+          <p:cNvSpPr/>
+          <p:nvPr/>
+        </p:nvSpPr>
+        <p:spPr>
+          <a:xfrm>
+            <a:off x="457200" y="5120640"/>
+            <a:ext cx="822960" cy="731520"/>
+          </a:xfrm>
+          <a:prstGeom prst="triangle">
+            <a:avLst/>
+          </a:prstGeom>
+          <a:noFill/>
+          <a:ln w="25400">
+            <a:solidFill>
+              <a:srgbClr val="FFFFFF"/>
+            </a:solidFill>
+          </a:ln>
+        </p:spPr>
+        <p:style>
+          <a:lnRef idx="1">
+            <a:schemeClr val="accent1"/>
+          </a:lnRef>
+          <a:fillRef idx="3">
+            <a:schemeClr val="accent1"/>
+          </a:fillRef>
+          <a:effectRef idx="2">
+            <a:schemeClr val="accent1"/>
+          </a:effectRef>
+          <a:fontRef idx="minor">
+            <a:schemeClr val="lt1"/>
+          </a:fontRef>
+        </p:style>
+        <p:txBody>
+          <a:bodyPr rtlCol="0" anchor="ctr"/>
+          <a:lstStyle/>
+          <a:p>
+            <a:pPr algn="ctr"/>
+          </a:p>
+        </p:txBody>
+      </p:sp>
+      <p:sp>
+        <p:nvSpPr>
+          <p:cNvPr id="6" name="TextBox 5"/>
+          <p:cNvSpPr txBox="1"/>
+          <p:nvPr/>
+        </p:nvSpPr>
+        <p:spPr>
+          <a:xfrm>
+            <a:off x="457200" y="5212080"/>
+            <a:ext cx="822960" cy="640080"/>
+          </a:xfrm>
+          <a:prstGeom prst="rect">
+            <a:avLst/>
+          </a:prstGeom>
+          <a:noFill/>
+        </p:spPr>
+        <p:txBody>
+          <a:bodyPr wrap="none">
+            <a:spAutoFit/>
+          </a:bodyPr>
+          <a:lstStyle/>
+          <a:p>
+            <a:pPr algn="ctr">
+              <a:defRPr sz="2400" b="1">
+                <a:solidFill>
+                  <a:srgbClr val="FFFFFF"/>
+                </a:solidFill>
+              </a:defRPr>
+            </a:pPr>
+            <a:r>
+              <a:t>!</a:t>
+            </a:r>
+          </a:p>
+        </p:txBody>
+      </p:sp>
+      <p:sp>
+        <p:nvSpPr>
+          <p:cNvPr id="7" name="Rectangle 6"/>
+          <p:cNvSpPr/>
+          <p:nvPr/>
+        </p:nvSpPr>
+        <p:spPr>
+          <a:xfrm>
+            <a:off x="457200" y="5989320"/>
+            <a:ext cx="3200400" cy="25400"/>
+          </a:xfrm>
+          <a:prstGeom prst="rect">
+            <a:avLst/>
+          </a:prstGeom>
+          <a:solidFill>
+            <a:srgbClr val="FFFFFF"/>
+          </a:solidFill>
+          <a:ln>
+            <a:noFill/>
+          </a:ln>
+        </p:spPr>
+        <p:style>
+          <a:lnRef idx="1">
+            <a:schemeClr val="accent1"/>
+          </a:lnRef>
+          <a:fillRef idx="3">
+            <a:schemeClr val="accent1"/>
+          </a:fillRef>
+          <a:effectRef idx="2">
+            <a:schemeClr val="accent1"/>
+          </a:effectRef>
+          <a:fontRef idx="minor">
+            <a:schemeClr val="lt1"/>
+          </a:fontRef>
+        </p:style>
+        <p:txBody>
+          <a:bodyPr rtlCol="0" anchor="ctr"/>
+          <a:lstStyle/>
+          <a:p>
+            <a:pPr algn="ctr"/>
+          </a:p>
+        </p:txBody>
+      </p:sp>
+      <p:sp>
+        <p:nvSpPr>
+          <p:cNvPr id="8" name="TextBox 7"/>
+          <p:cNvSpPr txBox="1"/>
+          <p:nvPr/>
+        </p:nvSpPr>
+        <p:spPr>
+          <a:xfrm>
+            <a:off x="457200" y="6126480"/>
+            <a:ext cx="1828800" cy="548640"/>
+          </a:xfrm>
+          <a:prstGeom prst="rect">
+            <a:avLst/>
+          </a:prstGeom>
+          <a:noFill/>
+        </p:spPr>
+        <p:txBody>
+          <a:bodyPr wrap="none">
+            <a:spAutoFit/>
+          </a:bodyPr>
+          <a:lstStyle/>
+          <a:p>
+            <a:pPr>
+              <a:defRPr sz="3200" b="1">
+                <a:solidFill>
+                  <a:srgbClr val="FFFFFF"/>
+                </a:solidFill>
+              </a:defRPr>
+            </a:pPr>
+            <a:r>
+              <a:t>slb</a:t>
+            </a:r>
+          </a:p>
+        </p:txBody>
+      </p:sp>
+      <p:sp>
+        <p:nvSpPr>
+          <p:cNvPr id="9" name="TextBox 8"/>
+          <p:cNvSpPr txBox="1"/>
+          <p:nvPr/>
+        </p:nvSpPr>
+        <p:spPr>
+          <a:xfrm>
+            <a:off x="4572000" y="457200"/>
+            <a:ext cx="7132320" cy="731520"/>
+          </a:xfrm>
+          <a:prstGeom prst="rect">
+            <a:avLst/>
+          </a:prstGeom>
+          <a:noFill/>
+        </p:spPr>
+        <p:txBody>
+          <a:bodyPr wrap="none">
+            <a:spAutoFit/>
+          </a:bodyPr>
+          <a:lstStyle/>
+          <a:p>
+            <a:pPr>
+              <a:defRPr sz="2800" b="1">
+                <a:solidFill>
+                  <a:srgbClr val="0000CC"/>
+                </a:solidFill>
+              </a:defRPr>
+            </a:pPr>
+            <a:r>
+              <a:t>How to Respond: The R.E.A.C.H. Method</a:t>
+            </a:r>
+          </a:p>
+        </p:txBody>
+      </p:sp>
+      <p:sp>
+        <p:nvSpPr>
+          <p:cNvPr id="10" name="Oval 9"/>
+          <p:cNvSpPr/>
+          <p:nvPr/>
+        </p:nvSpPr>
+        <p:spPr>
+          <a:xfrm>
+            <a:off x="4572000" y="1463040"/>
+            <a:ext cx="640080" cy="640080"/>
+          </a:xfrm>
+          <a:prstGeom prst="ellipse">
+            <a:avLst/>
+          </a:prstGeom>
+          <a:solidFill>
+            <a:srgbClr val="0000CC"/>
+          </a:solidFill>
+          <a:ln>
+            <a:noFill/>
+          </a:ln>
+        </p:spPr>
+        <p:style>
+          <a:lnRef idx="1">
+            <a:schemeClr val="accent1"/>
+          </a:lnRef>
+          <a:fillRef idx="3">
+            <a:schemeClr val="accent1"/>
+          </a:fillRef>
+          <a:effectRef idx="2">
+            <a:schemeClr val="accent1"/>
+          </a:effectRef>
+          <a:fontRef idx="minor">
+            <a:schemeClr val="lt1"/>
+          </a:fontRef>
+        </p:style>
+        <p:txBody>
+          <a:bodyPr rtlCol="0" anchor="ctr"/>
+          <a:lstStyle/>
+          <a:p>
+            <a:pPr algn="ctr">
+              <a:defRPr sz="2400" b="1">
+                <a:solidFill>
+                  <a:srgbClr val="FFFFFF"/>
+                </a:solidFill>
+              </a:defRPr>
+            </a:pPr>
+            <a:r>
+              <a:t>R</a:t>
+            </a:r>
+          </a:p>
+        </p:txBody>
+      </p:sp>
+      <p:sp>
+        <p:nvSpPr>
+          <p:cNvPr id="11" name="TextBox 10"/>
+          <p:cNvSpPr txBox="1"/>
+          <p:nvPr/>
+        </p:nvSpPr>
+        <p:spPr>
+          <a:xfrm>
+            <a:off x="5394960" y="1463040"/>
+            <a:ext cx="6400800" cy="822960"/>
           </a:xfrm>
           <a:prstGeom prst="rect">
             <a:avLst/>
@@ -4150,24 +5364,2783 @@
           </a:bodyPr>
           <a:lstStyle/>
           <a:p>
-            <a:pPr algn="l"/>
-            <a:r>
-              <a:rPr b="1" sz="1300">
-                <a:solidFill>
-                  <a:srgbClr val="F4A236"/>
-                </a:solidFill>
-                <a:latin typeface="Calibri"/>
-              </a:rPr>
-              <a:t>Remember: </a:t>
-            </a:r>
-            <a:r>
-              <a:rPr sz="1300">
-                <a:solidFill>
-                  <a:srgbClr val="D5E8EF"/>
-                </a:solidFill>
-                <a:latin typeface="Calibri"/>
-              </a:rPr>
-              <a:t>Take care of your mind. It takes care of your safety.</a:t>
+            <a:pPr>
+              <a:defRPr sz="1800" b="1">
+                <a:solidFill>
+                  <a:srgbClr val="333333"/>
+                </a:solidFill>
+              </a:defRPr>
+            </a:pPr>
+            <a:r>
+              <a:t>Recognize</a:t>
+            </a:r>
+          </a:p>
+          <a:p>
+            <a:pPr>
+              <a:spcBef>
+                <a:spcPts val="200"/>
+              </a:spcBef>
+              <a:defRPr sz="1400">
+                <a:solidFill>
+                  <a:srgbClr val="666666"/>
+                </a:solidFill>
+              </a:defRPr>
+            </a:pPr>
+            <a:r>
+              <a:t>Notice behavioral changes — trust your gut if something feels off.</a:t>
+            </a:r>
+          </a:p>
+        </p:txBody>
+      </p:sp>
+      <p:sp>
+        <p:nvSpPr>
+          <p:cNvPr id="12" name="Oval 11"/>
+          <p:cNvSpPr/>
+          <p:nvPr/>
+        </p:nvSpPr>
+        <p:spPr>
+          <a:xfrm>
+            <a:off x="4572000" y="2468880"/>
+            <a:ext cx="640080" cy="640080"/>
+          </a:xfrm>
+          <a:prstGeom prst="ellipse">
+            <a:avLst/>
+          </a:prstGeom>
+          <a:solidFill>
+            <a:srgbClr val="0000CC"/>
+          </a:solidFill>
+          <a:ln>
+            <a:noFill/>
+          </a:ln>
+        </p:spPr>
+        <p:style>
+          <a:lnRef idx="1">
+            <a:schemeClr val="accent1"/>
+          </a:lnRef>
+          <a:fillRef idx="3">
+            <a:schemeClr val="accent1"/>
+          </a:fillRef>
+          <a:effectRef idx="2">
+            <a:schemeClr val="accent1"/>
+          </a:effectRef>
+          <a:fontRef idx="minor">
+            <a:schemeClr val="lt1"/>
+          </a:fontRef>
+        </p:style>
+        <p:txBody>
+          <a:bodyPr rtlCol="0" anchor="ctr"/>
+          <a:lstStyle/>
+          <a:p>
+            <a:pPr algn="ctr">
+              <a:defRPr sz="2400" b="1">
+                <a:solidFill>
+                  <a:srgbClr val="FFFFFF"/>
+                </a:solidFill>
+              </a:defRPr>
+            </a:pPr>
+            <a:r>
+              <a:t>E</a:t>
+            </a:r>
+          </a:p>
+        </p:txBody>
+      </p:sp>
+      <p:sp>
+        <p:nvSpPr>
+          <p:cNvPr id="13" name="TextBox 12"/>
+          <p:cNvSpPr txBox="1"/>
+          <p:nvPr/>
+        </p:nvSpPr>
+        <p:spPr>
+          <a:xfrm>
+            <a:off x="5394960" y="2468880"/>
+            <a:ext cx="6400800" cy="822960"/>
+          </a:xfrm>
+          <a:prstGeom prst="rect">
+            <a:avLst/>
+          </a:prstGeom>
+          <a:noFill/>
+        </p:spPr>
+        <p:txBody>
+          <a:bodyPr wrap="square">
+            <a:spAutoFit/>
+          </a:bodyPr>
+          <a:lstStyle/>
+          <a:p>
+            <a:pPr>
+              <a:defRPr sz="1800" b="1">
+                <a:solidFill>
+                  <a:srgbClr val="333333"/>
+                </a:solidFill>
+              </a:defRPr>
+            </a:pPr>
+            <a:r>
+              <a:t>Engage</a:t>
+            </a:r>
+          </a:p>
+          <a:p>
+            <a:pPr>
+              <a:spcBef>
+                <a:spcPts val="200"/>
+              </a:spcBef>
+              <a:defRPr sz="1400">
+                <a:solidFill>
+                  <a:srgbClr val="666666"/>
+                </a:solidFill>
+              </a:defRPr>
+            </a:pPr>
+            <a:r>
+              <a:t>Pull them aside privately. "Hey, I've noticed you seem off lately. How are you really doing?"</a:t>
+            </a:r>
+          </a:p>
+        </p:txBody>
+      </p:sp>
+      <p:sp>
+        <p:nvSpPr>
+          <p:cNvPr id="14" name="Oval 13"/>
+          <p:cNvSpPr/>
+          <p:nvPr/>
+        </p:nvSpPr>
+        <p:spPr>
+          <a:xfrm>
+            <a:off x="4572000" y="3474720"/>
+            <a:ext cx="640080" cy="640080"/>
+          </a:xfrm>
+          <a:prstGeom prst="ellipse">
+            <a:avLst/>
+          </a:prstGeom>
+          <a:solidFill>
+            <a:srgbClr val="0000CC"/>
+          </a:solidFill>
+          <a:ln>
+            <a:noFill/>
+          </a:ln>
+        </p:spPr>
+        <p:style>
+          <a:lnRef idx="1">
+            <a:schemeClr val="accent1"/>
+          </a:lnRef>
+          <a:fillRef idx="3">
+            <a:schemeClr val="accent1"/>
+          </a:fillRef>
+          <a:effectRef idx="2">
+            <a:schemeClr val="accent1"/>
+          </a:effectRef>
+          <a:fontRef idx="minor">
+            <a:schemeClr val="lt1"/>
+          </a:fontRef>
+        </p:style>
+        <p:txBody>
+          <a:bodyPr rtlCol="0" anchor="ctr"/>
+          <a:lstStyle/>
+          <a:p>
+            <a:pPr algn="ctr">
+              <a:defRPr sz="2400" b="1">
+                <a:solidFill>
+                  <a:srgbClr val="FFFFFF"/>
+                </a:solidFill>
+              </a:defRPr>
+            </a:pPr>
+            <a:r>
+              <a:t>A</a:t>
+            </a:r>
+          </a:p>
+        </p:txBody>
+      </p:sp>
+      <p:sp>
+        <p:nvSpPr>
+          <p:cNvPr id="15" name="TextBox 14"/>
+          <p:cNvSpPr txBox="1"/>
+          <p:nvPr/>
+        </p:nvSpPr>
+        <p:spPr>
+          <a:xfrm>
+            <a:off x="5394960" y="3474720"/>
+            <a:ext cx="6400800" cy="822960"/>
+          </a:xfrm>
+          <a:prstGeom prst="rect">
+            <a:avLst/>
+          </a:prstGeom>
+          <a:noFill/>
+        </p:spPr>
+        <p:txBody>
+          <a:bodyPr wrap="square">
+            <a:spAutoFit/>
+          </a:bodyPr>
+          <a:lstStyle/>
+          <a:p>
+            <a:pPr>
+              <a:defRPr sz="1800" b="1">
+                <a:solidFill>
+                  <a:srgbClr val="333333"/>
+                </a:solidFill>
+              </a:defRPr>
+            </a:pPr>
+            <a:r>
+              <a:t>Ask Directly</a:t>
+            </a:r>
+          </a:p>
+          <a:p>
+            <a:pPr>
+              <a:spcBef>
+                <a:spcPts val="200"/>
+              </a:spcBef>
+              <a:defRPr sz="1400">
+                <a:solidFill>
+                  <a:srgbClr val="666666"/>
+                </a:solidFill>
+              </a:defRPr>
+            </a:pPr>
+            <a:r>
+              <a:t>"Are you thinking about hurting yourself?" Asking does NOT plant the idea. It opens the door.</a:t>
+            </a:r>
+          </a:p>
+        </p:txBody>
+      </p:sp>
+      <p:sp>
+        <p:nvSpPr>
+          <p:cNvPr id="16" name="Oval 15"/>
+          <p:cNvSpPr/>
+          <p:nvPr/>
+        </p:nvSpPr>
+        <p:spPr>
+          <a:xfrm>
+            <a:off x="4572000" y="4480560"/>
+            <a:ext cx="640080" cy="640080"/>
+          </a:xfrm>
+          <a:prstGeom prst="ellipse">
+            <a:avLst/>
+          </a:prstGeom>
+          <a:solidFill>
+            <a:srgbClr val="0000CC"/>
+          </a:solidFill>
+          <a:ln>
+            <a:noFill/>
+          </a:ln>
+        </p:spPr>
+        <p:style>
+          <a:lnRef idx="1">
+            <a:schemeClr val="accent1"/>
+          </a:lnRef>
+          <a:fillRef idx="3">
+            <a:schemeClr val="accent1"/>
+          </a:fillRef>
+          <a:effectRef idx="2">
+            <a:schemeClr val="accent1"/>
+          </a:effectRef>
+          <a:fontRef idx="minor">
+            <a:schemeClr val="lt1"/>
+          </a:fontRef>
+        </p:style>
+        <p:txBody>
+          <a:bodyPr rtlCol="0" anchor="ctr"/>
+          <a:lstStyle/>
+          <a:p>
+            <a:pPr algn="ctr">
+              <a:defRPr sz="2400" b="1">
+                <a:solidFill>
+                  <a:srgbClr val="FFFFFF"/>
+                </a:solidFill>
+              </a:defRPr>
+            </a:pPr>
+            <a:r>
+              <a:t>C</a:t>
+            </a:r>
+          </a:p>
+        </p:txBody>
+      </p:sp>
+      <p:sp>
+        <p:nvSpPr>
+          <p:cNvPr id="17" name="TextBox 16"/>
+          <p:cNvSpPr txBox="1"/>
+          <p:nvPr/>
+        </p:nvSpPr>
+        <p:spPr>
+          <a:xfrm>
+            <a:off x="5394960" y="4480560"/>
+            <a:ext cx="6400800" cy="822960"/>
+          </a:xfrm>
+          <a:prstGeom prst="rect">
+            <a:avLst/>
+          </a:prstGeom>
+          <a:noFill/>
+        </p:spPr>
+        <p:txBody>
+          <a:bodyPr wrap="square">
+            <a:spAutoFit/>
+          </a:bodyPr>
+          <a:lstStyle/>
+          <a:p>
+            <a:pPr>
+              <a:defRPr sz="1800" b="1">
+                <a:solidFill>
+                  <a:srgbClr val="333333"/>
+                </a:solidFill>
+              </a:defRPr>
+            </a:pPr>
+            <a:r>
+              <a:t>Connect</a:t>
+            </a:r>
+          </a:p>
+          <a:p>
+            <a:pPr>
+              <a:spcBef>
+                <a:spcPts val="200"/>
+              </a:spcBef>
+              <a:defRPr sz="1400">
+                <a:solidFill>
+                  <a:srgbClr val="666666"/>
+                </a:solidFill>
+              </a:defRPr>
+            </a:pPr>
+            <a:r>
+              <a:t>Help them access EAP, counseling, a trusted leader. Walk with them — don't just hand them a number.</a:t>
+            </a:r>
+          </a:p>
+        </p:txBody>
+      </p:sp>
+      <p:sp>
+        <p:nvSpPr>
+          <p:cNvPr id="18" name="Oval 17"/>
+          <p:cNvSpPr/>
+          <p:nvPr/>
+        </p:nvSpPr>
+        <p:spPr>
+          <a:xfrm>
+            <a:off x="4572000" y="5486400"/>
+            <a:ext cx="640080" cy="640080"/>
+          </a:xfrm>
+          <a:prstGeom prst="ellipse">
+            <a:avLst/>
+          </a:prstGeom>
+          <a:solidFill>
+            <a:srgbClr val="0000CC"/>
+          </a:solidFill>
+          <a:ln>
+            <a:noFill/>
+          </a:ln>
+        </p:spPr>
+        <p:style>
+          <a:lnRef idx="1">
+            <a:schemeClr val="accent1"/>
+          </a:lnRef>
+          <a:fillRef idx="3">
+            <a:schemeClr val="accent1"/>
+          </a:fillRef>
+          <a:effectRef idx="2">
+            <a:schemeClr val="accent1"/>
+          </a:effectRef>
+          <a:fontRef idx="minor">
+            <a:schemeClr val="lt1"/>
+          </a:fontRef>
+        </p:style>
+        <p:txBody>
+          <a:bodyPr rtlCol="0" anchor="ctr"/>
+          <a:lstStyle/>
+          <a:p>
+            <a:pPr algn="ctr">
+              <a:defRPr sz="2400" b="1">
+                <a:solidFill>
+                  <a:srgbClr val="FFFFFF"/>
+                </a:solidFill>
+              </a:defRPr>
+            </a:pPr>
+            <a:r>
+              <a:t>H</a:t>
+            </a:r>
+          </a:p>
+        </p:txBody>
+      </p:sp>
+      <p:sp>
+        <p:nvSpPr>
+          <p:cNvPr id="19" name="TextBox 18"/>
+          <p:cNvSpPr txBox="1"/>
+          <p:nvPr/>
+        </p:nvSpPr>
+        <p:spPr>
+          <a:xfrm>
+            <a:off x="5394960" y="5486400"/>
+            <a:ext cx="6400800" cy="822960"/>
+          </a:xfrm>
+          <a:prstGeom prst="rect">
+            <a:avLst/>
+          </a:prstGeom>
+          <a:noFill/>
+        </p:spPr>
+        <p:txBody>
+          <a:bodyPr wrap="square">
+            <a:spAutoFit/>
+          </a:bodyPr>
+          <a:lstStyle/>
+          <a:p>
+            <a:pPr>
+              <a:defRPr sz="1800" b="1">
+                <a:solidFill>
+                  <a:srgbClr val="333333"/>
+                </a:solidFill>
+              </a:defRPr>
+            </a:pPr>
+            <a:r>
+              <a:t>Hold Space</a:t>
+            </a:r>
+          </a:p>
+          <a:p>
+            <a:pPr>
+              <a:spcBef>
+                <a:spcPts val="200"/>
+              </a:spcBef>
+              <a:defRPr sz="1400">
+                <a:solidFill>
+                  <a:srgbClr val="666666"/>
+                </a:solidFill>
+              </a:defRPr>
+            </a:pPr>
+            <a:r>
+              <a:t>Follow up in a few days. Recovery isn't one conversation — consistency shows you mean it.</a:t>
+            </a:r>
+          </a:p>
+        </p:txBody>
+      </p:sp>
+    </p:spTree>
+  </p:cSld>
+  <p:clrMapOvr>
+    <a:masterClrMapping/>
+  </p:clrMapOvr>
+</p:sld>
+</file>
+
+<file path=ppt/slides/slide5.xml><?xml version="1.0" encoding="utf-8"?>
+<p:sld xmlns:a="http://schemas.openxmlformats.org/drawingml/2006/main" xmlns:p="http://schemas.openxmlformats.org/presentationml/2006/main" xmlns:r="http://schemas.openxmlformats.org/officeDocument/2006/relationships">
+  <p:cSld>
+    <p:spTree>
+      <p:nvGrpSpPr>
+        <p:cNvPr id="1" name=""/>
+        <p:cNvGrpSpPr/>
+        <p:nvPr/>
+      </p:nvGrpSpPr>
+      <p:grpSpPr/>
+      <p:sp>
+        <p:nvSpPr>
+          <p:cNvPr id="2" name="Rectangle 1"/>
+          <p:cNvSpPr/>
+          <p:nvPr/>
+        </p:nvSpPr>
+        <p:spPr>
+          <a:xfrm>
+            <a:off x="0" y="0"/>
+            <a:ext cx="4114800" cy="6858000"/>
+          </a:xfrm>
+          <a:prstGeom prst="rect">
+            <a:avLst/>
+          </a:prstGeom>
+          <a:solidFill>
+            <a:srgbClr val="0000CC"/>
+          </a:solidFill>
+          <a:ln>
+            <a:noFill/>
+          </a:ln>
+        </p:spPr>
+        <p:style>
+          <a:lnRef idx="1">
+            <a:schemeClr val="accent1"/>
+          </a:lnRef>
+          <a:fillRef idx="3">
+            <a:schemeClr val="accent1"/>
+          </a:fillRef>
+          <a:effectRef idx="2">
+            <a:schemeClr val="accent1"/>
+          </a:effectRef>
+          <a:fontRef idx="minor">
+            <a:schemeClr val="lt1"/>
+          </a:fontRef>
+        </p:style>
+        <p:txBody>
+          <a:bodyPr rtlCol="0" anchor="ctr"/>
+          <a:lstStyle/>
+          <a:p>
+            <a:pPr algn="ctr"/>
+          </a:p>
+        </p:txBody>
+      </p:sp>
+      <p:sp>
+        <p:nvSpPr>
+          <p:cNvPr id="3" name="Rounded Rectangle 2"/>
+          <p:cNvSpPr/>
+          <p:nvPr/>
+        </p:nvSpPr>
+        <p:spPr>
+          <a:xfrm>
+            <a:off x="365760" y="365760"/>
+            <a:ext cx="3291840" cy="1188720"/>
+          </a:xfrm>
+          <a:prstGeom prst="roundRect">
+            <a:avLst/>
+          </a:prstGeom>
+          <a:noFill/>
+          <a:ln w="38100">
+            <a:solidFill>
+              <a:srgbClr val="FFFFFF"/>
+            </a:solidFill>
+          </a:ln>
+        </p:spPr>
+        <p:style>
+          <a:lnRef idx="1">
+            <a:schemeClr val="accent1"/>
+          </a:lnRef>
+          <a:fillRef idx="3">
+            <a:schemeClr val="accent1"/>
+          </a:fillRef>
+          <a:effectRef idx="2">
+            <a:schemeClr val="accent1"/>
+          </a:effectRef>
+          <a:fontRef idx="minor">
+            <a:schemeClr val="lt1"/>
+          </a:fontRef>
+        </p:style>
+        <p:txBody>
+          <a:bodyPr rtlCol="0" anchor="ctr"/>
+          <a:lstStyle/>
+          <a:p>
+            <a:pPr algn="ctr">
+              <a:defRPr sz="2800" b="1">
+                <a:solidFill>
+                  <a:srgbClr val="FFFFFF"/>
+                </a:solidFill>
+              </a:defRPr>
+            </a:pPr>
+            <a:r>
+              <a:t>Safe Moment</a:t>
+            </a:r>
+          </a:p>
+        </p:txBody>
+      </p:sp>
+      <p:sp>
+        <p:nvSpPr>
+          <p:cNvPr id="4" name="Isosceles Triangle 3"/>
+          <p:cNvSpPr/>
+          <p:nvPr/>
+        </p:nvSpPr>
+        <p:spPr>
+          <a:xfrm rot="10800000">
+            <a:off x="1097280" y="1508760"/>
+            <a:ext cx="457200" cy="365760"/>
+          </a:xfrm>
+          <a:prstGeom prst="triangle">
+            <a:avLst/>
+          </a:prstGeom>
+          <a:noFill/>
+          <a:ln w="38100">
+            <a:solidFill>
+              <a:srgbClr val="FFFFFF"/>
+            </a:solidFill>
+          </a:ln>
+        </p:spPr>
+        <p:style>
+          <a:lnRef idx="1">
+            <a:schemeClr val="accent1"/>
+          </a:lnRef>
+          <a:fillRef idx="3">
+            <a:schemeClr val="accent1"/>
+          </a:fillRef>
+          <a:effectRef idx="2">
+            <a:schemeClr val="accent1"/>
+          </a:effectRef>
+          <a:fontRef idx="minor">
+            <a:schemeClr val="lt1"/>
+          </a:fontRef>
+        </p:style>
+        <p:txBody>
+          <a:bodyPr rtlCol="0" anchor="ctr"/>
+          <a:lstStyle/>
+          <a:p>
+            <a:pPr algn="ctr"/>
+          </a:p>
+        </p:txBody>
+      </p:sp>
+      <p:sp>
+        <p:nvSpPr>
+          <p:cNvPr id="5" name="Isosceles Triangle 4"/>
+          <p:cNvSpPr/>
+          <p:nvPr/>
+        </p:nvSpPr>
+        <p:spPr>
+          <a:xfrm>
+            <a:off x="457200" y="5120640"/>
+            <a:ext cx="822960" cy="731520"/>
+          </a:xfrm>
+          <a:prstGeom prst="triangle">
+            <a:avLst/>
+          </a:prstGeom>
+          <a:noFill/>
+          <a:ln w="25400">
+            <a:solidFill>
+              <a:srgbClr val="FFFFFF"/>
+            </a:solidFill>
+          </a:ln>
+        </p:spPr>
+        <p:style>
+          <a:lnRef idx="1">
+            <a:schemeClr val="accent1"/>
+          </a:lnRef>
+          <a:fillRef idx="3">
+            <a:schemeClr val="accent1"/>
+          </a:fillRef>
+          <a:effectRef idx="2">
+            <a:schemeClr val="accent1"/>
+          </a:effectRef>
+          <a:fontRef idx="minor">
+            <a:schemeClr val="lt1"/>
+          </a:fontRef>
+        </p:style>
+        <p:txBody>
+          <a:bodyPr rtlCol="0" anchor="ctr"/>
+          <a:lstStyle/>
+          <a:p>
+            <a:pPr algn="ctr"/>
+          </a:p>
+        </p:txBody>
+      </p:sp>
+      <p:sp>
+        <p:nvSpPr>
+          <p:cNvPr id="6" name="TextBox 5"/>
+          <p:cNvSpPr txBox="1"/>
+          <p:nvPr/>
+        </p:nvSpPr>
+        <p:spPr>
+          <a:xfrm>
+            <a:off x="457200" y="5212080"/>
+            <a:ext cx="822960" cy="640080"/>
+          </a:xfrm>
+          <a:prstGeom prst="rect">
+            <a:avLst/>
+          </a:prstGeom>
+          <a:noFill/>
+        </p:spPr>
+        <p:txBody>
+          <a:bodyPr wrap="none">
+            <a:spAutoFit/>
+          </a:bodyPr>
+          <a:lstStyle/>
+          <a:p>
+            <a:pPr algn="ctr">
+              <a:defRPr sz="2400" b="1">
+                <a:solidFill>
+                  <a:srgbClr val="FFFFFF"/>
+                </a:solidFill>
+              </a:defRPr>
+            </a:pPr>
+            <a:r>
+              <a:t>!</a:t>
+            </a:r>
+          </a:p>
+        </p:txBody>
+      </p:sp>
+      <p:sp>
+        <p:nvSpPr>
+          <p:cNvPr id="7" name="Rectangle 6"/>
+          <p:cNvSpPr/>
+          <p:nvPr/>
+        </p:nvSpPr>
+        <p:spPr>
+          <a:xfrm>
+            <a:off x="457200" y="5989320"/>
+            <a:ext cx="3200400" cy="25400"/>
+          </a:xfrm>
+          <a:prstGeom prst="rect">
+            <a:avLst/>
+          </a:prstGeom>
+          <a:solidFill>
+            <a:srgbClr val="FFFFFF"/>
+          </a:solidFill>
+          <a:ln>
+            <a:noFill/>
+          </a:ln>
+        </p:spPr>
+        <p:style>
+          <a:lnRef idx="1">
+            <a:schemeClr val="accent1"/>
+          </a:lnRef>
+          <a:fillRef idx="3">
+            <a:schemeClr val="accent1"/>
+          </a:fillRef>
+          <a:effectRef idx="2">
+            <a:schemeClr val="accent1"/>
+          </a:effectRef>
+          <a:fontRef idx="minor">
+            <a:schemeClr val="lt1"/>
+          </a:fontRef>
+        </p:style>
+        <p:txBody>
+          <a:bodyPr rtlCol="0" anchor="ctr"/>
+          <a:lstStyle/>
+          <a:p>
+            <a:pPr algn="ctr"/>
+          </a:p>
+        </p:txBody>
+      </p:sp>
+      <p:sp>
+        <p:nvSpPr>
+          <p:cNvPr id="8" name="TextBox 7"/>
+          <p:cNvSpPr txBox="1"/>
+          <p:nvPr/>
+        </p:nvSpPr>
+        <p:spPr>
+          <a:xfrm>
+            <a:off x="457200" y="6126480"/>
+            <a:ext cx="1828800" cy="548640"/>
+          </a:xfrm>
+          <a:prstGeom prst="rect">
+            <a:avLst/>
+          </a:prstGeom>
+          <a:noFill/>
+        </p:spPr>
+        <p:txBody>
+          <a:bodyPr wrap="none">
+            <a:spAutoFit/>
+          </a:bodyPr>
+          <a:lstStyle/>
+          <a:p>
+            <a:pPr>
+              <a:defRPr sz="3200" b="1">
+                <a:solidFill>
+                  <a:srgbClr val="FFFFFF"/>
+                </a:solidFill>
+              </a:defRPr>
+            </a:pPr>
+            <a:r>
+              <a:t>slb</a:t>
+            </a:r>
+          </a:p>
+        </p:txBody>
+      </p:sp>
+      <p:sp>
+        <p:nvSpPr>
+          <p:cNvPr id="9" name="TextBox 8"/>
+          <p:cNvSpPr txBox="1"/>
+          <p:nvPr/>
+        </p:nvSpPr>
+        <p:spPr>
+          <a:xfrm>
+            <a:off x="4572000" y="457200"/>
+            <a:ext cx="7132320" cy="731520"/>
+          </a:xfrm>
+          <a:prstGeom prst="rect">
+            <a:avLst/>
+          </a:prstGeom>
+          <a:noFill/>
+        </p:spPr>
+        <p:txBody>
+          <a:bodyPr wrap="none">
+            <a:spAutoFit/>
+          </a:bodyPr>
+          <a:lstStyle/>
+          <a:p>
+            <a:pPr>
+              <a:defRPr sz="2800" b="1">
+                <a:solidFill>
+                  <a:srgbClr val="0000CC"/>
+                </a:solidFill>
+              </a:defRPr>
+            </a:pPr>
+            <a:r>
+              <a:t>Breaking the Stigma: Myths vs. Reality</a:t>
+            </a:r>
+          </a:p>
+        </p:txBody>
+      </p:sp>
+      <p:sp>
+        <p:nvSpPr>
+          <p:cNvPr id="10" name="TextBox 9"/>
+          <p:cNvSpPr txBox="1"/>
+          <p:nvPr/>
+        </p:nvSpPr>
+        <p:spPr>
+          <a:xfrm>
+            <a:off x="4572000" y="1371600"/>
+            <a:ext cx="7132320" cy="365760"/>
+          </a:xfrm>
+          <a:prstGeom prst="rect">
+            <a:avLst/>
+          </a:prstGeom>
+          <a:noFill/>
+        </p:spPr>
+        <p:txBody>
+          <a:bodyPr wrap="square">
+            <a:spAutoFit/>
+          </a:bodyPr>
+          <a:lstStyle/>
+          <a:p>
+            <a:pPr>
+              <a:defRPr sz="1500" b="1">
+                <a:solidFill>
+                  <a:srgbClr val="CC3333"/>
+                </a:solidFill>
+              </a:defRPr>
+            </a:pPr>
+            <a:r>
+              <a:t>MYTH: "Tough people don't need help."</a:t>
+            </a:r>
+          </a:p>
+        </p:txBody>
+      </p:sp>
+      <p:sp>
+        <p:nvSpPr>
+          <p:cNvPr id="11" name="TextBox 10"/>
+          <p:cNvSpPr txBox="1"/>
+          <p:nvPr/>
+        </p:nvSpPr>
+        <p:spPr>
+          <a:xfrm>
+            <a:off x="4572000" y="1737360"/>
+            <a:ext cx="7132320" cy="731520"/>
+          </a:xfrm>
+          <a:prstGeom prst="rect">
+            <a:avLst/>
+          </a:prstGeom>
+          <a:noFill/>
+        </p:spPr>
+        <p:txBody>
+          <a:bodyPr wrap="square">
+            <a:spAutoFit/>
+          </a:bodyPr>
+          <a:lstStyle/>
+          <a:p>
+            <a:pPr>
+              <a:defRPr sz="1400">
+                <a:solidFill>
+                  <a:srgbClr val="333333"/>
+                </a:solidFill>
+              </a:defRPr>
+            </a:pPr>
+            <a:r>
+              <a:t>REALITY: The toughest thing you can do is ask for help. SEALs, astronauts, and elite athletes all use mental health support.</a:t>
+            </a:r>
+          </a:p>
+        </p:txBody>
+      </p:sp>
+      <p:sp>
+        <p:nvSpPr>
+          <p:cNvPr id="12" name="TextBox 11"/>
+          <p:cNvSpPr txBox="1"/>
+          <p:nvPr/>
+        </p:nvSpPr>
+        <p:spPr>
+          <a:xfrm>
+            <a:off x="4572000" y="2697480"/>
+            <a:ext cx="7132320" cy="365760"/>
+          </a:xfrm>
+          <a:prstGeom prst="rect">
+            <a:avLst/>
+          </a:prstGeom>
+          <a:noFill/>
+        </p:spPr>
+        <p:txBody>
+          <a:bodyPr wrap="square">
+            <a:spAutoFit/>
+          </a:bodyPr>
+          <a:lstStyle/>
+          <a:p>
+            <a:pPr>
+              <a:defRPr sz="1500" b="1">
+                <a:solidFill>
+                  <a:srgbClr val="CC3333"/>
+                </a:solidFill>
+              </a:defRPr>
+            </a:pPr>
+            <a:r>
+              <a:t>MYTH: "It's personal, not a work issue."</a:t>
+            </a:r>
+          </a:p>
+        </p:txBody>
+      </p:sp>
+      <p:sp>
+        <p:nvSpPr>
+          <p:cNvPr id="13" name="TextBox 12"/>
+          <p:cNvSpPr txBox="1"/>
+          <p:nvPr/>
+        </p:nvSpPr>
+        <p:spPr>
+          <a:xfrm>
+            <a:off x="4572000" y="3063240"/>
+            <a:ext cx="7132320" cy="731520"/>
+          </a:xfrm>
+          <a:prstGeom prst="rect">
+            <a:avLst/>
+          </a:prstGeom>
+          <a:noFill/>
+        </p:spPr>
+        <p:txBody>
+          <a:bodyPr wrap="square">
+            <a:spAutoFit/>
+          </a:bodyPr>
+          <a:lstStyle/>
+          <a:p>
+            <a:pPr>
+              <a:defRPr sz="1400">
+                <a:solidFill>
+                  <a:srgbClr val="333333"/>
+                </a:solidFill>
+              </a:defRPr>
+            </a:pPr>
+            <a:r>
+              <a:t>REALITY: When mental health suffers, safety drops. We spend more waking hours at work than anywhere else.</a:t>
+            </a:r>
+          </a:p>
+        </p:txBody>
+      </p:sp>
+      <p:sp>
+        <p:nvSpPr>
+          <p:cNvPr id="14" name="TextBox 13"/>
+          <p:cNvSpPr txBox="1"/>
+          <p:nvPr/>
+        </p:nvSpPr>
+        <p:spPr>
+          <a:xfrm>
+            <a:off x="4572000" y="4023360"/>
+            <a:ext cx="7132320" cy="365760"/>
+          </a:xfrm>
+          <a:prstGeom prst="rect">
+            <a:avLst/>
+          </a:prstGeom>
+          <a:noFill/>
+        </p:spPr>
+        <p:txBody>
+          <a:bodyPr wrap="square">
+            <a:spAutoFit/>
+          </a:bodyPr>
+          <a:lstStyle/>
+          <a:p>
+            <a:pPr>
+              <a:defRPr sz="1500" b="1">
+                <a:solidFill>
+                  <a:srgbClr val="CC3333"/>
+                </a:solidFill>
+              </a:defRPr>
+            </a:pPr>
+            <a:r>
+              <a:t>MYTH: "Talking about it makes it worse."</a:t>
+            </a:r>
+          </a:p>
+        </p:txBody>
+      </p:sp>
+      <p:sp>
+        <p:nvSpPr>
+          <p:cNvPr id="15" name="TextBox 14"/>
+          <p:cNvSpPr txBox="1"/>
+          <p:nvPr/>
+        </p:nvSpPr>
+        <p:spPr>
+          <a:xfrm>
+            <a:off x="4572000" y="4389120"/>
+            <a:ext cx="7132320" cy="731520"/>
+          </a:xfrm>
+          <a:prstGeom prst="rect">
+            <a:avLst/>
+          </a:prstGeom>
+          <a:noFill/>
+        </p:spPr>
+        <p:txBody>
+          <a:bodyPr wrap="square">
+            <a:spAutoFit/>
+          </a:bodyPr>
+          <a:lstStyle/>
+          <a:p>
+            <a:pPr>
+              <a:defRPr sz="1400">
+                <a:solidFill>
+                  <a:srgbClr val="333333"/>
+                </a:solidFill>
+              </a:defRPr>
+            </a:pPr>
+            <a:r>
+              <a:t>REALITY: Research shows the opposite. Open conversation reduces distress and can be life-saving.</a:t>
+            </a:r>
+          </a:p>
+        </p:txBody>
+      </p:sp>
+      <p:sp>
+        <p:nvSpPr>
+          <p:cNvPr id="16" name="TextBox 15"/>
+          <p:cNvSpPr txBox="1"/>
+          <p:nvPr/>
+        </p:nvSpPr>
+        <p:spPr>
+          <a:xfrm>
+            <a:off x="4572000" y="5349240"/>
+            <a:ext cx="7132320" cy="365760"/>
+          </a:xfrm>
+          <a:prstGeom prst="rect">
+            <a:avLst/>
+          </a:prstGeom>
+          <a:noFill/>
+        </p:spPr>
+        <p:txBody>
+          <a:bodyPr wrap="square">
+            <a:spAutoFit/>
+          </a:bodyPr>
+          <a:lstStyle/>
+          <a:p>
+            <a:pPr>
+              <a:defRPr sz="1500" b="1">
+                <a:solidFill>
+                  <a:srgbClr val="CC3333"/>
+                </a:solidFill>
+              </a:defRPr>
+            </a:pPr>
+            <a:r>
+              <a:t>MYTH: "I'll get fired if I speak up."</a:t>
+            </a:r>
+          </a:p>
+        </p:txBody>
+      </p:sp>
+      <p:sp>
+        <p:nvSpPr>
+          <p:cNvPr id="17" name="TextBox 16"/>
+          <p:cNvSpPr txBox="1"/>
+          <p:nvPr/>
+        </p:nvSpPr>
+        <p:spPr>
+          <a:xfrm>
+            <a:off x="4572000" y="5715000"/>
+            <a:ext cx="7132320" cy="731520"/>
+          </a:xfrm>
+          <a:prstGeom prst="rect">
+            <a:avLst/>
+          </a:prstGeom>
+          <a:noFill/>
+        </p:spPr>
+        <p:txBody>
+          <a:bodyPr wrap="square">
+            <a:spAutoFit/>
+          </a:bodyPr>
+          <a:lstStyle/>
+          <a:p>
+            <a:pPr>
+              <a:defRPr sz="1400">
+                <a:solidFill>
+                  <a:srgbClr val="333333"/>
+                </a:solidFill>
+              </a:defRPr>
+            </a:pPr>
+            <a:r>
+              <a:t>REALITY: EAP services are confidential. Leaders who create safe cultures see higher retention and fewer incidents.</a:t>
+            </a:r>
+          </a:p>
+        </p:txBody>
+      </p:sp>
+    </p:spTree>
+  </p:cSld>
+  <p:clrMapOvr>
+    <a:masterClrMapping/>
+  </p:clrMapOvr>
+</p:sld>
+</file>
+
+<file path=ppt/slides/slide6.xml><?xml version="1.0" encoding="utf-8"?>
+<p:sld xmlns:a="http://schemas.openxmlformats.org/drawingml/2006/main" xmlns:p="http://schemas.openxmlformats.org/presentationml/2006/main" xmlns:r="http://schemas.openxmlformats.org/officeDocument/2006/relationships">
+  <p:cSld>
+    <p:spTree>
+      <p:nvGrpSpPr>
+        <p:cNvPr id="1" name=""/>
+        <p:cNvGrpSpPr/>
+        <p:nvPr/>
+      </p:nvGrpSpPr>
+      <p:grpSpPr/>
+      <p:sp>
+        <p:nvSpPr>
+          <p:cNvPr id="2" name="Rectangle 1"/>
+          <p:cNvSpPr/>
+          <p:nvPr/>
+        </p:nvSpPr>
+        <p:spPr>
+          <a:xfrm>
+            <a:off x="0" y="0"/>
+            <a:ext cx="4114800" cy="6858000"/>
+          </a:xfrm>
+          <a:prstGeom prst="rect">
+            <a:avLst/>
+          </a:prstGeom>
+          <a:solidFill>
+            <a:srgbClr val="0000CC"/>
+          </a:solidFill>
+          <a:ln>
+            <a:noFill/>
+          </a:ln>
+        </p:spPr>
+        <p:style>
+          <a:lnRef idx="1">
+            <a:schemeClr val="accent1"/>
+          </a:lnRef>
+          <a:fillRef idx="3">
+            <a:schemeClr val="accent1"/>
+          </a:fillRef>
+          <a:effectRef idx="2">
+            <a:schemeClr val="accent1"/>
+          </a:effectRef>
+          <a:fontRef idx="minor">
+            <a:schemeClr val="lt1"/>
+          </a:fontRef>
+        </p:style>
+        <p:txBody>
+          <a:bodyPr rtlCol="0" anchor="ctr"/>
+          <a:lstStyle/>
+          <a:p>
+            <a:pPr algn="ctr"/>
+          </a:p>
+        </p:txBody>
+      </p:sp>
+      <p:sp>
+        <p:nvSpPr>
+          <p:cNvPr id="3" name="Rounded Rectangle 2"/>
+          <p:cNvSpPr/>
+          <p:nvPr/>
+        </p:nvSpPr>
+        <p:spPr>
+          <a:xfrm>
+            <a:off x="365760" y="365760"/>
+            <a:ext cx="3291840" cy="1188720"/>
+          </a:xfrm>
+          <a:prstGeom prst="roundRect">
+            <a:avLst/>
+          </a:prstGeom>
+          <a:noFill/>
+          <a:ln w="38100">
+            <a:solidFill>
+              <a:srgbClr val="FFFFFF"/>
+            </a:solidFill>
+          </a:ln>
+        </p:spPr>
+        <p:style>
+          <a:lnRef idx="1">
+            <a:schemeClr val="accent1"/>
+          </a:lnRef>
+          <a:fillRef idx="3">
+            <a:schemeClr val="accent1"/>
+          </a:fillRef>
+          <a:effectRef idx="2">
+            <a:schemeClr val="accent1"/>
+          </a:effectRef>
+          <a:fontRef idx="minor">
+            <a:schemeClr val="lt1"/>
+          </a:fontRef>
+        </p:style>
+        <p:txBody>
+          <a:bodyPr rtlCol="0" anchor="ctr"/>
+          <a:lstStyle/>
+          <a:p>
+            <a:pPr algn="ctr">
+              <a:defRPr sz="2800" b="1">
+                <a:solidFill>
+                  <a:srgbClr val="FFFFFF"/>
+                </a:solidFill>
+              </a:defRPr>
+            </a:pPr>
+            <a:r>
+              <a:t>Safe Moment</a:t>
+            </a:r>
+          </a:p>
+        </p:txBody>
+      </p:sp>
+      <p:sp>
+        <p:nvSpPr>
+          <p:cNvPr id="4" name="Isosceles Triangle 3"/>
+          <p:cNvSpPr/>
+          <p:nvPr/>
+        </p:nvSpPr>
+        <p:spPr>
+          <a:xfrm rot="10800000">
+            <a:off x="1097280" y="1508760"/>
+            <a:ext cx="457200" cy="365760"/>
+          </a:xfrm>
+          <a:prstGeom prst="triangle">
+            <a:avLst/>
+          </a:prstGeom>
+          <a:noFill/>
+          <a:ln w="38100">
+            <a:solidFill>
+              <a:srgbClr val="FFFFFF"/>
+            </a:solidFill>
+          </a:ln>
+        </p:spPr>
+        <p:style>
+          <a:lnRef idx="1">
+            <a:schemeClr val="accent1"/>
+          </a:lnRef>
+          <a:fillRef idx="3">
+            <a:schemeClr val="accent1"/>
+          </a:fillRef>
+          <a:effectRef idx="2">
+            <a:schemeClr val="accent1"/>
+          </a:effectRef>
+          <a:fontRef idx="minor">
+            <a:schemeClr val="lt1"/>
+          </a:fontRef>
+        </p:style>
+        <p:txBody>
+          <a:bodyPr rtlCol="0" anchor="ctr"/>
+          <a:lstStyle/>
+          <a:p>
+            <a:pPr algn="ctr"/>
+          </a:p>
+        </p:txBody>
+      </p:sp>
+      <p:sp>
+        <p:nvSpPr>
+          <p:cNvPr id="5" name="Isosceles Triangle 4"/>
+          <p:cNvSpPr/>
+          <p:nvPr/>
+        </p:nvSpPr>
+        <p:spPr>
+          <a:xfrm>
+            <a:off x="457200" y="5120640"/>
+            <a:ext cx="822960" cy="731520"/>
+          </a:xfrm>
+          <a:prstGeom prst="triangle">
+            <a:avLst/>
+          </a:prstGeom>
+          <a:noFill/>
+          <a:ln w="25400">
+            <a:solidFill>
+              <a:srgbClr val="FFFFFF"/>
+            </a:solidFill>
+          </a:ln>
+        </p:spPr>
+        <p:style>
+          <a:lnRef idx="1">
+            <a:schemeClr val="accent1"/>
+          </a:lnRef>
+          <a:fillRef idx="3">
+            <a:schemeClr val="accent1"/>
+          </a:fillRef>
+          <a:effectRef idx="2">
+            <a:schemeClr val="accent1"/>
+          </a:effectRef>
+          <a:fontRef idx="minor">
+            <a:schemeClr val="lt1"/>
+          </a:fontRef>
+        </p:style>
+        <p:txBody>
+          <a:bodyPr rtlCol="0" anchor="ctr"/>
+          <a:lstStyle/>
+          <a:p>
+            <a:pPr algn="ctr"/>
+          </a:p>
+        </p:txBody>
+      </p:sp>
+      <p:sp>
+        <p:nvSpPr>
+          <p:cNvPr id="6" name="TextBox 5"/>
+          <p:cNvSpPr txBox="1"/>
+          <p:nvPr/>
+        </p:nvSpPr>
+        <p:spPr>
+          <a:xfrm>
+            <a:off x="457200" y="5212080"/>
+            <a:ext cx="822960" cy="640080"/>
+          </a:xfrm>
+          <a:prstGeom prst="rect">
+            <a:avLst/>
+          </a:prstGeom>
+          <a:noFill/>
+        </p:spPr>
+        <p:txBody>
+          <a:bodyPr wrap="none">
+            <a:spAutoFit/>
+          </a:bodyPr>
+          <a:lstStyle/>
+          <a:p>
+            <a:pPr algn="ctr">
+              <a:defRPr sz="2400" b="1">
+                <a:solidFill>
+                  <a:srgbClr val="FFFFFF"/>
+                </a:solidFill>
+              </a:defRPr>
+            </a:pPr>
+            <a:r>
+              <a:t>!</a:t>
+            </a:r>
+          </a:p>
+        </p:txBody>
+      </p:sp>
+      <p:sp>
+        <p:nvSpPr>
+          <p:cNvPr id="7" name="Rectangle 6"/>
+          <p:cNvSpPr/>
+          <p:nvPr/>
+        </p:nvSpPr>
+        <p:spPr>
+          <a:xfrm>
+            <a:off x="457200" y="5989320"/>
+            <a:ext cx="3200400" cy="25400"/>
+          </a:xfrm>
+          <a:prstGeom prst="rect">
+            <a:avLst/>
+          </a:prstGeom>
+          <a:solidFill>
+            <a:srgbClr val="FFFFFF"/>
+          </a:solidFill>
+          <a:ln>
+            <a:noFill/>
+          </a:ln>
+        </p:spPr>
+        <p:style>
+          <a:lnRef idx="1">
+            <a:schemeClr val="accent1"/>
+          </a:lnRef>
+          <a:fillRef idx="3">
+            <a:schemeClr val="accent1"/>
+          </a:fillRef>
+          <a:effectRef idx="2">
+            <a:schemeClr val="accent1"/>
+          </a:effectRef>
+          <a:fontRef idx="minor">
+            <a:schemeClr val="lt1"/>
+          </a:fontRef>
+        </p:style>
+        <p:txBody>
+          <a:bodyPr rtlCol="0" anchor="ctr"/>
+          <a:lstStyle/>
+          <a:p>
+            <a:pPr algn="ctr"/>
+          </a:p>
+        </p:txBody>
+      </p:sp>
+      <p:sp>
+        <p:nvSpPr>
+          <p:cNvPr id="8" name="TextBox 7"/>
+          <p:cNvSpPr txBox="1"/>
+          <p:nvPr/>
+        </p:nvSpPr>
+        <p:spPr>
+          <a:xfrm>
+            <a:off x="457200" y="6126480"/>
+            <a:ext cx="1828800" cy="548640"/>
+          </a:xfrm>
+          <a:prstGeom prst="rect">
+            <a:avLst/>
+          </a:prstGeom>
+          <a:noFill/>
+        </p:spPr>
+        <p:txBody>
+          <a:bodyPr wrap="none">
+            <a:spAutoFit/>
+          </a:bodyPr>
+          <a:lstStyle/>
+          <a:p>
+            <a:pPr>
+              <a:defRPr sz="3200" b="1">
+                <a:solidFill>
+                  <a:srgbClr val="FFFFFF"/>
+                </a:solidFill>
+              </a:defRPr>
+            </a:pPr>
+            <a:r>
+              <a:t>slb</a:t>
+            </a:r>
+          </a:p>
+        </p:txBody>
+      </p:sp>
+      <p:sp>
+        <p:nvSpPr>
+          <p:cNvPr id="9" name="TextBox 8"/>
+          <p:cNvSpPr txBox="1"/>
+          <p:nvPr/>
+        </p:nvSpPr>
+        <p:spPr>
+          <a:xfrm>
+            <a:off x="4572000" y="457200"/>
+            <a:ext cx="7132320" cy="731520"/>
+          </a:xfrm>
+          <a:prstGeom prst="rect">
+            <a:avLst/>
+          </a:prstGeom>
+          <a:noFill/>
+        </p:spPr>
+        <p:txBody>
+          <a:bodyPr wrap="none">
+            <a:spAutoFit/>
+          </a:bodyPr>
+          <a:lstStyle/>
+          <a:p>
+            <a:pPr>
+              <a:defRPr sz="2800" b="1">
+                <a:solidFill>
+                  <a:srgbClr val="0000CC"/>
+                </a:solidFill>
+              </a:defRPr>
+            </a:pPr>
+            <a:r>
+              <a:t>What You Can Do Today</a:t>
+            </a:r>
+          </a:p>
+        </p:txBody>
+      </p:sp>
+      <p:sp>
+        <p:nvSpPr>
+          <p:cNvPr id="10" name="TextBox 9"/>
+          <p:cNvSpPr txBox="1"/>
+          <p:nvPr/>
+        </p:nvSpPr>
+        <p:spPr>
+          <a:xfrm>
+            <a:off x="4572000" y="1280160"/>
+            <a:ext cx="7132320" cy="5029200"/>
+          </a:xfrm>
+          <a:prstGeom prst="rect">
+            <a:avLst/>
+          </a:prstGeom>
+          <a:noFill/>
+        </p:spPr>
+        <p:txBody>
+          <a:bodyPr wrap="square">
+            <a:spAutoFit/>
+          </a:bodyPr>
+          <a:lstStyle/>
+          <a:p>
+            <a:pPr>
+              <a:spcBef>
+                <a:spcPts val="1400"/>
+              </a:spcBef>
+              <a:defRPr sz="1800" b="1">
+                <a:solidFill>
+                  <a:srgbClr val="333333"/>
+                </a:solidFill>
+              </a:defRPr>
+            </a:pPr>
+            <a:r>
+              <a:t>As an Individual</a:t>
+            </a:r>
+          </a:p>
+          <a:p>
+            <a:pPr>
+              <a:spcBef>
+                <a:spcPts val="400"/>
+              </a:spcBef>
+              <a:defRPr sz="1400">
+                <a:solidFill>
+                  <a:srgbClr val="333333"/>
+                </a:solidFill>
+              </a:defRPr>
+            </a:pPr>
+            <a:r>
+              <a:t>- Check in with yourself — rate your mental energy 1-10 today</a:t>
+            </a:r>
+          </a:p>
+          <a:p>
+            <a:pPr>
+              <a:spcBef>
+                <a:spcPts val="400"/>
+              </a:spcBef>
+              <a:defRPr sz="1400">
+                <a:solidFill>
+                  <a:srgbClr val="333333"/>
+                </a:solidFill>
+              </a:defRPr>
+            </a:pPr>
+            <a:r>
+              <a:t>- If you're below a 5, tell someone: supervisor, peer, friend</a:t>
+            </a:r>
+          </a:p>
+          <a:p>
+            <a:pPr>
+              <a:spcBef>
+                <a:spcPts val="400"/>
+              </a:spcBef>
+              <a:defRPr sz="1400">
+                <a:solidFill>
+                  <a:srgbClr val="333333"/>
+                </a:solidFill>
+              </a:defRPr>
+            </a:pPr>
+            <a:r>
+              <a:t>- Use your EAP — free, confidential, available 24/7</a:t>
+            </a:r>
+          </a:p>
+          <a:p>
+            <a:pPr>
+              <a:spcBef>
+                <a:spcPts val="400"/>
+              </a:spcBef>
+              <a:defRPr sz="1400">
+                <a:solidFill>
+                  <a:srgbClr val="333333"/>
+                </a:solidFill>
+              </a:defRPr>
+            </a:pPr>
+            <a:r>
+              <a:t>- Set one boundary this week (no emails after 7pm, real lunch break)</a:t>
+            </a:r>
+          </a:p>
+          <a:p>
+            <a:pPr>
+              <a:spcBef>
+                <a:spcPts val="400"/>
+              </a:spcBef>
+            </a:pPr>
+          </a:p>
+          <a:p>
+            <a:pPr>
+              <a:spcBef>
+                <a:spcPts val="1400"/>
+              </a:spcBef>
+              <a:defRPr sz="1800" b="1">
+                <a:solidFill>
+                  <a:srgbClr val="333333"/>
+                </a:solidFill>
+              </a:defRPr>
+            </a:pPr>
+            <a:r>
+              <a:t>As a Team Member</a:t>
+            </a:r>
+          </a:p>
+          <a:p>
+            <a:pPr>
+              <a:spcBef>
+                <a:spcPts val="400"/>
+              </a:spcBef>
+              <a:defRPr sz="1400">
+                <a:solidFill>
+                  <a:srgbClr val="333333"/>
+                </a:solidFill>
+              </a:defRPr>
+            </a:pPr>
+            <a:r>
+              <a:t>- Make "How are you doing?" a real question, not a greeting</a:t>
+            </a:r>
+          </a:p>
+          <a:p>
+            <a:pPr>
+              <a:spcBef>
+                <a:spcPts val="400"/>
+              </a:spcBef>
+              <a:defRPr sz="1400">
+                <a:solidFill>
+                  <a:srgbClr val="333333"/>
+                </a:solidFill>
+              </a:defRPr>
+            </a:pPr>
+            <a:r>
+              <a:t>- Normalize saying "I'm having a rough day"</a:t>
+            </a:r>
+          </a:p>
+          <a:p>
+            <a:pPr>
+              <a:spcBef>
+                <a:spcPts val="400"/>
+              </a:spcBef>
+              <a:defRPr sz="1400">
+                <a:solidFill>
+                  <a:srgbClr val="333333"/>
+                </a:solidFill>
+              </a:defRPr>
+            </a:pPr>
+            <a:r>
+              <a:t>- Look out for the quiet ones — they may need help most</a:t>
+            </a:r>
+          </a:p>
+          <a:p>
+            <a:pPr>
+              <a:spcBef>
+                <a:spcPts val="400"/>
+              </a:spcBef>
+              <a:defRPr sz="1400">
+                <a:solidFill>
+                  <a:srgbClr val="333333"/>
+                </a:solidFill>
+              </a:defRPr>
+            </a:pPr>
+            <a:r>
+              <a:t>- Buddy-check systems work for mental health just like physical safety</a:t>
+            </a:r>
+          </a:p>
+          <a:p>
+            <a:pPr>
+              <a:spcBef>
+                <a:spcPts val="400"/>
+              </a:spcBef>
+            </a:pPr>
+          </a:p>
+          <a:p>
+            <a:pPr>
+              <a:spcBef>
+                <a:spcPts val="1400"/>
+              </a:spcBef>
+              <a:defRPr sz="1800" b="1">
+                <a:solidFill>
+                  <a:srgbClr val="333333"/>
+                </a:solidFill>
+              </a:defRPr>
+            </a:pPr>
+            <a:r>
+              <a:t>As a Leader</a:t>
+            </a:r>
+          </a:p>
+          <a:p>
+            <a:pPr>
+              <a:spcBef>
+                <a:spcPts val="400"/>
+              </a:spcBef>
+              <a:defRPr sz="1400">
+                <a:solidFill>
+                  <a:srgbClr val="333333"/>
+                </a:solidFill>
+              </a:defRPr>
+            </a:pPr>
+            <a:r>
+              <a:t>- Start your next pre-job meeting with a mental health check-in</a:t>
+            </a:r>
+          </a:p>
+          <a:p>
+            <a:pPr>
+              <a:spcBef>
+                <a:spcPts val="400"/>
+              </a:spcBef>
+              <a:defRPr sz="1400">
+                <a:solidFill>
+                  <a:srgbClr val="333333"/>
+                </a:solidFill>
+              </a:defRPr>
+            </a:pPr>
+            <a:r>
+              <a:t>- Share your own struggles — vulnerability from leaders is powerful</a:t>
+            </a:r>
+          </a:p>
+          <a:p>
+            <a:pPr>
+              <a:spcBef>
+                <a:spcPts val="400"/>
+              </a:spcBef>
+              <a:defRPr sz="1400">
+                <a:solidFill>
+                  <a:srgbClr val="333333"/>
+                </a:solidFill>
+              </a:defRPr>
+            </a:pPr>
+            <a:r>
+              <a:t>- Know your EAP contact — save it in your phone right now</a:t>
+            </a:r>
+          </a:p>
+          <a:p>
+            <a:pPr>
+              <a:spcBef>
+                <a:spcPts val="400"/>
+              </a:spcBef>
+              <a:defRPr sz="1400">
+                <a:solidFill>
+                  <a:srgbClr val="333333"/>
+                </a:solidFill>
+              </a:defRPr>
+            </a:pPr>
+            <a:r>
+              <a:t>- Make it clear: asking for help is strength, not weakness</a:t>
+            </a:r>
+          </a:p>
+        </p:txBody>
+      </p:sp>
+    </p:spTree>
+  </p:cSld>
+  <p:clrMapOvr>
+    <a:masterClrMapping/>
+  </p:clrMapOvr>
+</p:sld>
+</file>
+
+<file path=ppt/slides/slide7.xml><?xml version="1.0" encoding="utf-8"?>
+<p:sld xmlns:a="http://schemas.openxmlformats.org/drawingml/2006/main" xmlns:p="http://schemas.openxmlformats.org/presentationml/2006/main" xmlns:r="http://schemas.openxmlformats.org/officeDocument/2006/relationships">
+  <p:cSld>
+    <p:spTree>
+      <p:nvGrpSpPr>
+        <p:cNvPr id="1" name=""/>
+        <p:cNvGrpSpPr/>
+        <p:nvPr/>
+      </p:nvGrpSpPr>
+      <p:grpSpPr/>
+      <p:sp>
+        <p:nvSpPr>
+          <p:cNvPr id="2" name="Rectangle 1"/>
+          <p:cNvSpPr/>
+          <p:nvPr/>
+        </p:nvSpPr>
+        <p:spPr>
+          <a:xfrm>
+            <a:off x="0" y="0"/>
+            <a:ext cx="4114800" cy="6858000"/>
+          </a:xfrm>
+          <a:prstGeom prst="rect">
+            <a:avLst/>
+          </a:prstGeom>
+          <a:solidFill>
+            <a:srgbClr val="0000CC"/>
+          </a:solidFill>
+          <a:ln>
+            <a:noFill/>
+          </a:ln>
+        </p:spPr>
+        <p:style>
+          <a:lnRef idx="1">
+            <a:schemeClr val="accent1"/>
+          </a:lnRef>
+          <a:fillRef idx="3">
+            <a:schemeClr val="accent1"/>
+          </a:fillRef>
+          <a:effectRef idx="2">
+            <a:schemeClr val="accent1"/>
+          </a:effectRef>
+          <a:fontRef idx="minor">
+            <a:schemeClr val="lt1"/>
+          </a:fontRef>
+        </p:style>
+        <p:txBody>
+          <a:bodyPr rtlCol="0" anchor="ctr"/>
+          <a:lstStyle/>
+          <a:p>
+            <a:pPr algn="ctr"/>
+          </a:p>
+        </p:txBody>
+      </p:sp>
+      <p:sp>
+        <p:nvSpPr>
+          <p:cNvPr id="3" name="Rounded Rectangle 2"/>
+          <p:cNvSpPr/>
+          <p:nvPr/>
+        </p:nvSpPr>
+        <p:spPr>
+          <a:xfrm>
+            <a:off x="365760" y="365760"/>
+            <a:ext cx="3291840" cy="1188720"/>
+          </a:xfrm>
+          <a:prstGeom prst="roundRect">
+            <a:avLst/>
+          </a:prstGeom>
+          <a:noFill/>
+          <a:ln w="38100">
+            <a:solidFill>
+              <a:srgbClr val="FFFFFF"/>
+            </a:solidFill>
+          </a:ln>
+        </p:spPr>
+        <p:style>
+          <a:lnRef idx="1">
+            <a:schemeClr val="accent1"/>
+          </a:lnRef>
+          <a:fillRef idx="3">
+            <a:schemeClr val="accent1"/>
+          </a:fillRef>
+          <a:effectRef idx="2">
+            <a:schemeClr val="accent1"/>
+          </a:effectRef>
+          <a:fontRef idx="minor">
+            <a:schemeClr val="lt1"/>
+          </a:fontRef>
+        </p:style>
+        <p:txBody>
+          <a:bodyPr rtlCol="0" anchor="ctr"/>
+          <a:lstStyle/>
+          <a:p>
+            <a:pPr algn="ctr">
+              <a:defRPr sz="2800" b="1">
+                <a:solidFill>
+                  <a:srgbClr val="FFFFFF"/>
+                </a:solidFill>
+              </a:defRPr>
+            </a:pPr>
+            <a:r>
+              <a:t>Safe Moment</a:t>
+            </a:r>
+          </a:p>
+        </p:txBody>
+      </p:sp>
+      <p:sp>
+        <p:nvSpPr>
+          <p:cNvPr id="4" name="Isosceles Triangle 3"/>
+          <p:cNvSpPr/>
+          <p:nvPr/>
+        </p:nvSpPr>
+        <p:spPr>
+          <a:xfrm rot="10800000">
+            <a:off x="1097280" y="1508760"/>
+            <a:ext cx="457200" cy="365760"/>
+          </a:xfrm>
+          <a:prstGeom prst="triangle">
+            <a:avLst/>
+          </a:prstGeom>
+          <a:noFill/>
+          <a:ln w="38100">
+            <a:solidFill>
+              <a:srgbClr val="FFFFFF"/>
+            </a:solidFill>
+          </a:ln>
+        </p:spPr>
+        <p:style>
+          <a:lnRef idx="1">
+            <a:schemeClr val="accent1"/>
+          </a:lnRef>
+          <a:fillRef idx="3">
+            <a:schemeClr val="accent1"/>
+          </a:fillRef>
+          <a:effectRef idx="2">
+            <a:schemeClr val="accent1"/>
+          </a:effectRef>
+          <a:fontRef idx="minor">
+            <a:schemeClr val="lt1"/>
+          </a:fontRef>
+        </p:style>
+        <p:txBody>
+          <a:bodyPr rtlCol="0" anchor="ctr"/>
+          <a:lstStyle/>
+          <a:p>
+            <a:pPr algn="ctr"/>
+          </a:p>
+        </p:txBody>
+      </p:sp>
+      <p:sp>
+        <p:nvSpPr>
+          <p:cNvPr id="5" name="Isosceles Triangle 4"/>
+          <p:cNvSpPr/>
+          <p:nvPr/>
+        </p:nvSpPr>
+        <p:spPr>
+          <a:xfrm>
+            <a:off x="457200" y="5120640"/>
+            <a:ext cx="822960" cy="731520"/>
+          </a:xfrm>
+          <a:prstGeom prst="triangle">
+            <a:avLst/>
+          </a:prstGeom>
+          <a:noFill/>
+          <a:ln w="25400">
+            <a:solidFill>
+              <a:srgbClr val="FFFFFF"/>
+            </a:solidFill>
+          </a:ln>
+        </p:spPr>
+        <p:style>
+          <a:lnRef idx="1">
+            <a:schemeClr val="accent1"/>
+          </a:lnRef>
+          <a:fillRef idx="3">
+            <a:schemeClr val="accent1"/>
+          </a:fillRef>
+          <a:effectRef idx="2">
+            <a:schemeClr val="accent1"/>
+          </a:effectRef>
+          <a:fontRef idx="minor">
+            <a:schemeClr val="lt1"/>
+          </a:fontRef>
+        </p:style>
+        <p:txBody>
+          <a:bodyPr rtlCol="0" anchor="ctr"/>
+          <a:lstStyle/>
+          <a:p>
+            <a:pPr algn="ctr"/>
+          </a:p>
+        </p:txBody>
+      </p:sp>
+      <p:sp>
+        <p:nvSpPr>
+          <p:cNvPr id="6" name="TextBox 5"/>
+          <p:cNvSpPr txBox="1"/>
+          <p:nvPr/>
+        </p:nvSpPr>
+        <p:spPr>
+          <a:xfrm>
+            <a:off x="457200" y="5212080"/>
+            <a:ext cx="822960" cy="640080"/>
+          </a:xfrm>
+          <a:prstGeom prst="rect">
+            <a:avLst/>
+          </a:prstGeom>
+          <a:noFill/>
+        </p:spPr>
+        <p:txBody>
+          <a:bodyPr wrap="none">
+            <a:spAutoFit/>
+          </a:bodyPr>
+          <a:lstStyle/>
+          <a:p>
+            <a:pPr algn="ctr">
+              <a:defRPr sz="2400" b="1">
+                <a:solidFill>
+                  <a:srgbClr val="FFFFFF"/>
+                </a:solidFill>
+              </a:defRPr>
+            </a:pPr>
+            <a:r>
+              <a:t>!</a:t>
+            </a:r>
+          </a:p>
+        </p:txBody>
+      </p:sp>
+      <p:sp>
+        <p:nvSpPr>
+          <p:cNvPr id="7" name="Rectangle 6"/>
+          <p:cNvSpPr/>
+          <p:nvPr/>
+        </p:nvSpPr>
+        <p:spPr>
+          <a:xfrm>
+            <a:off x="457200" y="5989320"/>
+            <a:ext cx="3200400" cy="25400"/>
+          </a:xfrm>
+          <a:prstGeom prst="rect">
+            <a:avLst/>
+          </a:prstGeom>
+          <a:solidFill>
+            <a:srgbClr val="FFFFFF"/>
+          </a:solidFill>
+          <a:ln>
+            <a:noFill/>
+          </a:ln>
+        </p:spPr>
+        <p:style>
+          <a:lnRef idx="1">
+            <a:schemeClr val="accent1"/>
+          </a:lnRef>
+          <a:fillRef idx="3">
+            <a:schemeClr val="accent1"/>
+          </a:fillRef>
+          <a:effectRef idx="2">
+            <a:schemeClr val="accent1"/>
+          </a:effectRef>
+          <a:fontRef idx="minor">
+            <a:schemeClr val="lt1"/>
+          </a:fontRef>
+        </p:style>
+        <p:txBody>
+          <a:bodyPr rtlCol="0" anchor="ctr"/>
+          <a:lstStyle/>
+          <a:p>
+            <a:pPr algn="ctr"/>
+          </a:p>
+        </p:txBody>
+      </p:sp>
+      <p:sp>
+        <p:nvSpPr>
+          <p:cNvPr id="8" name="TextBox 7"/>
+          <p:cNvSpPr txBox="1"/>
+          <p:nvPr/>
+        </p:nvSpPr>
+        <p:spPr>
+          <a:xfrm>
+            <a:off x="457200" y="6126480"/>
+            <a:ext cx="1828800" cy="548640"/>
+          </a:xfrm>
+          <a:prstGeom prst="rect">
+            <a:avLst/>
+          </a:prstGeom>
+          <a:noFill/>
+        </p:spPr>
+        <p:txBody>
+          <a:bodyPr wrap="none">
+            <a:spAutoFit/>
+          </a:bodyPr>
+          <a:lstStyle/>
+          <a:p>
+            <a:pPr>
+              <a:defRPr sz="3200" b="1">
+                <a:solidFill>
+                  <a:srgbClr val="FFFFFF"/>
+                </a:solidFill>
+              </a:defRPr>
+            </a:pPr>
+            <a:r>
+              <a:t>slb</a:t>
+            </a:r>
+          </a:p>
+        </p:txBody>
+      </p:sp>
+      <p:sp>
+        <p:nvSpPr>
+          <p:cNvPr id="9" name="TextBox 8"/>
+          <p:cNvSpPr txBox="1"/>
+          <p:nvPr/>
+        </p:nvSpPr>
+        <p:spPr>
+          <a:xfrm>
+            <a:off x="4572000" y="457200"/>
+            <a:ext cx="7132320" cy="731520"/>
+          </a:xfrm>
+          <a:prstGeom prst="rect">
+            <a:avLst/>
+          </a:prstGeom>
+          <a:noFill/>
+        </p:spPr>
+        <p:txBody>
+          <a:bodyPr wrap="none">
+            <a:spAutoFit/>
+          </a:bodyPr>
+          <a:lstStyle/>
+          <a:p>
+            <a:pPr>
+              <a:defRPr sz="2800" b="1">
+                <a:solidFill>
+                  <a:srgbClr val="0000CC"/>
+                </a:solidFill>
+              </a:defRPr>
+            </a:pPr>
+            <a:r>
+              <a:t>Resources &amp; Crisis Support</a:t>
+            </a:r>
+          </a:p>
+        </p:txBody>
+      </p:sp>
+      <p:sp>
+        <p:nvSpPr>
+          <p:cNvPr id="10" name="Rounded Rectangle 9"/>
+          <p:cNvSpPr/>
+          <p:nvPr/>
+        </p:nvSpPr>
+        <p:spPr>
+          <a:xfrm>
+            <a:off x="4572000" y="1371600"/>
+            <a:ext cx="7132320" cy="1463040"/>
+          </a:xfrm>
+          <a:prstGeom prst="roundRect">
+            <a:avLst/>
+          </a:prstGeom>
+          <a:solidFill>
+            <a:srgbClr val="FDE8E8"/>
+          </a:solidFill>
+          <a:ln w="25400">
+            <a:solidFill>
+              <a:srgbClr val="CC0000"/>
+            </a:solidFill>
+          </a:ln>
+        </p:spPr>
+        <p:style>
+          <a:lnRef idx="1">
+            <a:schemeClr val="accent1"/>
+          </a:lnRef>
+          <a:fillRef idx="3">
+            <a:schemeClr val="accent1"/>
+          </a:fillRef>
+          <a:effectRef idx="2">
+            <a:schemeClr val="accent1"/>
+          </a:effectRef>
+          <a:fontRef idx="minor">
+            <a:schemeClr val="lt1"/>
+          </a:fontRef>
+        </p:style>
+        <p:txBody>
+          <a:bodyPr rtlCol="0" anchor="ctr" wrap="square"/>
+          <a:lstStyle/>
+          <a:p>
+            <a:pPr algn="ctr">
+              <a:defRPr sz="2000" b="1">
+                <a:solidFill>
+                  <a:srgbClr val="CC0000"/>
+                </a:solidFill>
+              </a:defRPr>
+            </a:pPr>
+            <a:r>
+              <a:t>IN A CRISIS — ACT NOW</a:t>
+            </a:r>
+          </a:p>
+          <a:p>
+            <a:pPr algn="ctr">
+              <a:spcBef>
+                <a:spcPts val="600"/>
+              </a:spcBef>
+              <a:defRPr sz="1600" b="1">
+                <a:solidFill>
+                  <a:srgbClr val="333333"/>
+                </a:solidFill>
+              </a:defRPr>
+            </a:pPr>
+            <a:r>
+              <a:t>988 Suicide &amp; Crisis Lifeline — Call or text 988 (24/7)</a:t>
+            </a:r>
+          </a:p>
+          <a:p>
+            <a:pPr algn="ctr">
+              <a:spcBef>
+                <a:spcPts val="600"/>
+              </a:spcBef>
+              <a:defRPr sz="1600" b="1">
+                <a:solidFill>
+                  <a:srgbClr val="333333"/>
+                </a:solidFill>
+              </a:defRPr>
+            </a:pPr>
+            <a:r>
+              <a:t>Crisis Text Line — Text HOME to 741741</a:t>
+            </a:r>
+          </a:p>
+          <a:p>
+            <a:pPr algn="ctr">
+              <a:spcBef>
+                <a:spcPts val="600"/>
+              </a:spcBef>
+              <a:defRPr sz="1600" b="1">
+                <a:solidFill>
+                  <a:srgbClr val="333333"/>
+                </a:solidFill>
+              </a:defRPr>
+            </a:pPr>
+            <a:r>
+              <a:t>Emergency Services — Call 911</a:t>
+            </a:r>
+          </a:p>
+        </p:txBody>
+      </p:sp>
+      <p:sp>
+        <p:nvSpPr>
+          <p:cNvPr id="11" name="TextBox 10"/>
+          <p:cNvSpPr txBox="1"/>
+          <p:nvPr/>
+        </p:nvSpPr>
+        <p:spPr>
+          <a:xfrm>
+            <a:off x="4572000" y="3017520"/>
+            <a:ext cx="7132320" cy="5029200"/>
+          </a:xfrm>
+          <a:prstGeom prst="rect">
+            <a:avLst/>
+          </a:prstGeom>
+          <a:noFill/>
+        </p:spPr>
+        <p:txBody>
+          <a:bodyPr wrap="square">
+            <a:spAutoFit/>
+          </a:bodyPr>
+          <a:lstStyle/>
+          <a:p>
+            <a:pPr>
+              <a:spcBef>
+                <a:spcPts val="1400"/>
+              </a:spcBef>
+              <a:defRPr sz="1800" b="1">
+                <a:solidFill>
+                  <a:srgbClr val="333333"/>
+                </a:solidFill>
+              </a:defRPr>
+            </a:pPr>
+            <a:r>
+              <a:t>Ongoing Support</a:t>
+            </a:r>
+          </a:p>
+          <a:p>
+            <a:pPr>
+              <a:spcBef>
+                <a:spcPts val="400"/>
+              </a:spcBef>
+              <a:defRPr sz="1400">
+                <a:solidFill>
+                  <a:srgbClr val="333333"/>
+                </a:solidFill>
+              </a:defRPr>
+            </a:pPr>
+            <a:r>
+              <a:t>- Employee Assistance Program (EAP) — check with HR / benefits</a:t>
+            </a:r>
+          </a:p>
+          <a:p>
+            <a:pPr>
+              <a:spcBef>
+                <a:spcPts val="400"/>
+              </a:spcBef>
+              <a:defRPr sz="1400">
+                <a:solidFill>
+                  <a:srgbClr val="333333"/>
+                </a:solidFill>
+              </a:defRPr>
+            </a:pPr>
+            <a:r>
+              <a:t>- SAMHSA Helpline — 1-800-662-4357 (free, confidential, 24/7)</a:t>
+            </a:r>
+          </a:p>
+          <a:p>
+            <a:pPr>
+              <a:spcBef>
+                <a:spcPts val="400"/>
+              </a:spcBef>
+              <a:defRPr sz="1400">
+                <a:solidFill>
+                  <a:srgbClr val="333333"/>
+                </a:solidFill>
+              </a:defRPr>
+            </a:pPr>
+            <a:r>
+              <a:t>- NAMI — nami.org</a:t>
+            </a:r>
+          </a:p>
+          <a:p>
+            <a:pPr>
+              <a:spcBef>
+                <a:spcPts val="400"/>
+              </a:spcBef>
+            </a:pPr>
+          </a:p>
+          <a:p>
+            <a:pPr>
+              <a:spcBef>
+                <a:spcPts val="1400"/>
+              </a:spcBef>
+              <a:defRPr sz="1800" b="1">
+                <a:solidFill>
+                  <a:srgbClr val="333333"/>
+                </a:solidFill>
+              </a:defRPr>
+            </a:pPr>
+            <a:r>
+              <a:t>Self-Care Tools</a:t>
+            </a:r>
+          </a:p>
+          <a:p>
+            <a:pPr>
+              <a:spcBef>
+                <a:spcPts val="400"/>
+              </a:spcBef>
+              <a:defRPr sz="1400">
+                <a:solidFill>
+                  <a:srgbClr val="333333"/>
+                </a:solidFill>
+              </a:defRPr>
+            </a:pPr>
+            <a:r>
+              <a:t>- Apps: Calm, Headspace, Woebot, PTSD Coach</a:t>
+            </a:r>
+          </a:p>
+          <a:p>
+            <a:pPr>
+              <a:spcBef>
+                <a:spcPts val="400"/>
+              </a:spcBef>
+              <a:defRPr sz="1400">
+                <a:solidFill>
+                  <a:srgbClr val="333333"/>
+                </a:solidFill>
+              </a:defRPr>
+            </a:pPr>
+            <a:r>
+              <a:t>- Journaling: 5 minutes of writing measurably reduces stress</a:t>
+            </a:r>
+          </a:p>
+          <a:p>
+            <a:pPr>
+              <a:spcBef>
+                <a:spcPts val="400"/>
+              </a:spcBef>
+              <a:defRPr sz="1400">
+                <a:solidFill>
+                  <a:srgbClr val="333333"/>
+                </a:solidFill>
+              </a:defRPr>
+            </a:pPr>
+            <a:r>
+              <a:t>- Movement: 20 min walking cuts anxiety symptoms by 30%</a:t>
+            </a:r>
+          </a:p>
+          <a:p>
+            <a:pPr>
+              <a:spcBef>
+                <a:spcPts val="400"/>
+              </a:spcBef>
+            </a:pPr>
+          </a:p>
+          <a:p>
+            <a:pPr>
+              <a:spcBef>
+                <a:spcPts val="1400"/>
+              </a:spcBef>
+              <a:defRPr sz="1800" b="1">
+                <a:solidFill>
+                  <a:srgbClr val="333333"/>
+                </a:solidFill>
+              </a:defRPr>
+            </a:pPr>
+            <a:r>
+              <a:t>Remember</a:t>
+            </a:r>
+          </a:p>
+          <a:p>
+            <a:pPr>
+              <a:spcBef>
+                <a:spcPts val="400"/>
+              </a:spcBef>
+              <a:defRPr sz="1400">
+                <a:solidFill>
+                  <a:srgbClr val="333333"/>
+                </a:solidFill>
+              </a:defRPr>
+            </a:pPr>
+            <a:r>
+              <a:t>- You don't need to be "in crisis" to use these resources</a:t>
+            </a:r>
+          </a:p>
+          <a:p>
+            <a:pPr>
+              <a:spcBef>
+                <a:spcPts val="400"/>
+              </a:spcBef>
+              <a:defRPr sz="1400">
+                <a:solidFill>
+                  <a:srgbClr val="333333"/>
+                </a:solidFill>
+              </a:defRPr>
+            </a:pPr>
+            <a:r>
+              <a:t>- Reaching out early is the smartest safety decision you can make</a:t>
+            </a:r>
+          </a:p>
+          <a:p>
+            <a:pPr>
+              <a:spcBef>
+                <a:spcPts val="400"/>
+              </a:spcBef>
+              <a:defRPr sz="1400">
+                <a:solidFill>
+                  <a:srgbClr val="333333"/>
+                </a:solidFill>
+              </a:defRPr>
+            </a:pPr>
+            <a:r>
+              <a:t>- You are not a burden — you are a valued team member</a:t>
+            </a:r>
+          </a:p>
+        </p:txBody>
+      </p:sp>
+    </p:spTree>
+  </p:cSld>
+  <p:clrMapOvr>
+    <a:masterClrMapping/>
+  </p:clrMapOvr>
+</p:sld>
+</file>
+
+<file path=ppt/slides/slide8.xml><?xml version="1.0" encoding="utf-8"?>
+<p:sld xmlns:a="http://schemas.openxmlformats.org/drawingml/2006/main" xmlns:p="http://schemas.openxmlformats.org/presentationml/2006/main" xmlns:r="http://schemas.openxmlformats.org/officeDocument/2006/relationships">
+  <p:cSld>
+    <p:spTree>
+      <p:nvGrpSpPr>
+        <p:cNvPr id="1" name=""/>
+        <p:cNvGrpSpPr/>
+        <p:nvPr/>
+      </p:nvGrpSpPr>
+      <p:grpSpPr/>
+      <p:sp>
+        <p:nvSpPr>
+          <p:cNvPr id="2" name="Rectangle 1"/>
+          <p:cNvSpPr/>
+          <p:nvPr/>
+        </p:nvSpPr>
+        <p:spPr>
+          <a:xfrm>
+            <a:off x="0" y="0"/>
+            <a:ext cx="4114800" cy="6858000"/>
+          </a:xfrm>
+          <a:prstGeom prst="rect">
+            <a:avLst/>
+          </a:prstGeom>
+          <a:solidFill>
+            <a:srgbClr val="0000CC"/>
+          </a:solidFill>
+          <a:ln>
+            <a:noFill/>
+          </a:ln>
+        </p:spPr>
+        <p:style>
+          <a:lnRef idx="1">
+            <a:schemeClr val="accent1"/>
+          </a:lnRef>
+          <a:fillRef idx="3">
+            <a:schemeClr val="accent1"/>
+          </a:fillRef>
+          <a:effectRef idx="2">
+            <a:schemeClr val="accent1"/>
+          </a:effectRef>
+          <a:fontRef idx="minor">
+            <a:schemeClr val="lt1"/>
+          </a:fontRef>
+        </p:style>
+        <p:txBody>
+          <a:bodyPr rtlCol="0" anchor="ctr"/>
+          <a:lstStyle/>
+          <a:p>
+            <a:pPr algn="ctr"/>
+          </a:p>
+        </p:txBody>
+      </p:sp>
+      <p:sp>
+        <p:nvSpPr>
+          <p:cNvPr id="3" name="Rounded Rectangle 2"/>
+          <p:cNvSpPr/>
+          <p:nvPr/>
+        </p:nvSpPr>
+        <p:spPr>
+          <a:xfrm>
+            <a:off x="365760" y="365760"/>
+            <a:ext cx="3291840" cy="1188720"/>
+          </a:xfrm>
+          <a:prstGeom prst="roundRect">
+            <a:avLst/>
+          </a:prstGeom>
+          <a:noFill/>
+          <a:ln w="38100">
+            <a:solidFill>
+              <a:srgbClr val="FFFFFF"/>
+            </a:solidFill>
+          </a:ln>
+        </p:spPr>
+        <p:style>
+          <a:lnRef idx="1">
+            <a:schemeClr val="accent1"/>
+          </a:lnRef>
+          <a:fillRef idx="3">
+            <a:schemeClr val="accent1"/>
+          </a:fillRef>
+          <a:effectRef idx="2">
+            <a:schemeClr val="accent1"/>
+          </a:effectRef>
+          <a:fontRef idx="minor">
+            <a:schemeClr val="lt1"/>
+          </a:fontRef>
+        </p:style>
+        <p:txBody>
+          <a:bodyPr rtlCol="0" anchor="ctr"/>
+          <a:lstStyle/>
+          <a:p>
+            <a:pPr algn="ctr">
+              <a:defRPr sz="2800" b="1">
+                <a:solidFill>
+                  <a:srgbClr val="FFFFFF"/>
+                </a:solidFill>
+              </a:defRPr>
+            </a:pPr>
+            <a:r>
+              <a:t>Safe Moment</a:t>
+            </a:r>
+          </a:p>
+        </p:txBody>
+      </p:sp>
+      <p:sp>
+        <p:nvSpPr>
+          <p:cNvPr id="4" name="Isosceles Triangle 3"/>
+          <p:cNvSpPr/>
+          <p:nvPr/>
+        </p:nvSpPr>
+        <p:spPr>
+          <a:xfrm rot="10800000">
+            <a:off x="1097280" y="1508760"/>
+            <a:ext cx="457200" cy="365760"/>
+          </a:xfrm>
+          <a:prstGeom prst="triangle">
+            <a:avLst/>
+          </a:prstGeom>
+          <a:noFill/>
+          <a:ln w="38100">
+            <a:solidFill>
+              <a:srgbClr val="FFFFFF"/>
+            </a:solidFill>
+          </a:ln>
+        </p:spPr>
+        <p:style>
+          <a:lnRef idx="1">
+            <a:schemeClr val="accent1"/>
+          </a:lnRef>
+          <a:fillRef idx="3">
+            <a:schemeClr val="accent1"/>
+          </a:fillRef>
+          <a:effectRef idx="2">
+            <a:schemeClr val="accent1"/>
+          </a:effectRef>
+          <a:fontRef idx="minor">
+            <a:schemeClr val="lt1"/>
+          </a:fontRef>
+        </p:style>
+        <p:txBody>
+          <a:bodyPr rtlCol="0" anchor="ctr"/>
+          <a:lstStyle/>
+          <a:p>
+            <a:pPr algn="ctr"/>
+          </a:p>
+        </p:txBody>
+      </p:sp>
+      <p:sp>
+        <p:nvSpPr>
+          <p:cNvPr id="5" name="Isosceles Triangle 4"/>
+          <p:cNvSpPr/>
+          <p:nvPr/>
+        </p:nvSpPr>
+        <p:spPr>
+          <a:xfrm>
+            <a:off x="457200" y="5120640"/>
+            <a:ext cx="822960" cy="731520"/>
+          </a:xfrm>
+          <a:prstGeom prst="triangle">
+            <a:avLst/>
+          </a:prstGeom>
+          <a:noFill/>
+          <a:ln w="25400">
+            <a:solidFill>
+              <a:srgbClr val="FFFFFF"/>
+            </a:solidFill>
+          </a:ln>
+        </p:spPr>
+        <p:style>
+          <a:lnRef idx="1">
+            <a:schemeClr val="accent1"/>
+          </a:lnRef>
+          <a:fillRef idx="3">
+            <a:schemeClr val="accent1"/>
+          </a:fillRef>
+          <a:effectRef idx="2">
+            <a:schemeClr val="accent1"/>
+          </a:effectRef>
+          <a:fontRef idx="minor">
+            <a:schemeClr val="lt1"/>
+          </a:fontRef>
+        </p:style>
+        <p:txBody>
+          <a:bodyPr rtlCol="0" anchor="ctr"/>
+          <a:lstStyle/>
+          <a:p>
+            <a:pPr algn="ctr"/>
+          </a:p>
+        </p:txBody>
+      </p:sp>
+      <p:sp>
+        <p:nvSpPr>
+          <p:cNvPr id="6" name="TextBox 5"/>
+          <p:cNvSpPr txBox="1"/>
+          <p:nvPr/>
+        </p:nvSpPr>
+        <p:spPr>
+          <a:xfrm>
+            <a:off x="457200" y="5212080"/>
+            <a:ext cx="822960" cy="640080"/>
+          </a:xfrm>
+          <a:prstGeom prst="rect">
+            <a:avLst/>
+          </a:prstGeom>
+          <a:noFill/>
+        </p:spPr>
+        <p:txBody>
+          <a:bodyPr wrap="none">
+            <a:spAutoFit/>
+          </a:bodyPr>
+          <a:lstStyle/>
+          <a:p>
+            <a:pPr algn="ctr">
+              <a:defRPr sz="2400" b="1">
+                <a:solidFill>
+                  <a:srgbClr val="FFFFFF"/>
+                </a:solidFill>
+              </a:defRPr>
+            </a:pPr>
+            <a:r>
+              <a:t>!</a:t>
+            </a:r>
+          </a:p>
+        </p:txBody>
+      </p:sp>
+      <p:sp>
+        <p:nvSpPr>
+          <p:cNvPr id="7" name="Rectangle 6"/>
+          <p:cNvSpPr/>
+          <p:nvPr/>
+        </p:nvSpPr>
+        <p:spPr>
+          <a:xfrm>
+            <a:off x="457200" y="5989320"/>
+            <a:ext cx="3200400" cy="25400"/>
+          </a:xfrm>
+          <a:prstGeom prst="rect">
+            <a:avLst/>
+          </a:prstGeom>
+          <a:solidFill>
+            <a:srgbClr val="FFFFFF"/>
+          </a:solidFill>
+          <a:ln>
+            <a:noFill/>
+          </a:ln>
+        </p:spPr>
+        <p:style>
+          <a:lnRef idx="1">
+            <a:schemeClr val="accent1"/>
+          </a:lnRef>
+          <a:fillRef idx="3">
+            <a:schemeClr val="accent1"/>
+          </a:fillRef>
+          <a:effectRef idx="2">
+            <a:schemeClr val="accent1"/>
+          </a:effectRef>
+          <a:fontRef idx="minor">
+            <a:schemeClr val="lt1"/>
+          </a:fontRef>
+        </p:style>
+        <p:txBody>
+          <a:bodyPr rtlCol="0" anchor="ctr"/>
+          <a:lstStyle/>
+          <a:p>
+            <a:pPr algn="ctr"/>
+          </a:p>
+        </p:txBody>
+      </p:sp>
+      <p:sp>
+        <p:nvSpPr>
+          <p:cNvPr id="8" name="TextBox 7"/>
+          <p:cNvSpPr txBox="1"/>
+          <p:nvPr/>
+        </p:nvSpPr>
+        <p:spPr>
+          <a:xfrm>
+            <a:off x="457200" y="6126480"/>
+            <a:ext cx="1828800" cy="548640"/>
+          </a:xfrm>
+          <a:prstGeom prst="rect">
+            <a:avLst/>
+          </a:prstGeom>
+          <a:noFill/>
+        </p:spPr>
+        <p:txBody>
+          <a:bodyPr wrap="none">
+            <a:spAutoFit/>
+          </a:bodyPr>
+          <a:lstStyle/>
+          <a:p>
+            <a:pPr>
+              <a:defRPr sz="3200" b="1">
+                <a:solidFill>
+                  <a:srgbClr val="FFFFFF"/>
+                </a:solidFill>
+              </a:defRPr>
+            </a:pPr>
+            <a:r>
+              <a:t>slb</a:t>
+            </a:r>
+          </a:p>
+        </p:txBody>
+      </p:sp>
+      <p:sp>
+        <p:nvSpPr>
+          <p:cNvPr id="9" name="TextBox 8"/>
+          <p:cNvSpPr txBox="1"/>
+          <p:nvPr/>
+        </p:nvSpPr>
+        <p:spPr>
+          <a:xfrm>
+            <a:off x="4572000" y="1371600"/>
+            <a:ext cx="7132320" cy="1828800"/>
+          </a:xfrm>
+          <a:prstGeom prst="rect">
+            <a:avLst/>
+          </a:prstGeom>
+          <a:noFill/>
+        </p:spPr>
+        <p:txBody>
+          <a:bodyPr wrap="square">
+            <a:spAutoFit/>
+          </a:bodyPr>
+          <a:lstStyle/>
+          <a:p>
+            <a:pPr algn="ctr">
+              <a:defRPr sz="3000" b="1">
+                <a:solidFill>
+                  <a:srgbClr val="0000CC"/>
+                </a:solidFill>
+              </a:defRPr>
+            </a:pPr>
+            <a:r>
+              <a:t>"Safety isn't just about</a:t>
+            </a:r>
+            <a:br/>
+            <a:r>
+              <a:t>going home in one piece.</a:t>
+            </a:r>
+          </a:p>
+          <a:p>
+            <a:pPr algn="ctr">
+              <a:spcBef>
+                <a:spcPts val="800"/>
+              </a:spcBef>
+              <a:defRPr sz="3000" b="1">
+                <a:solidFill>
+                  <a:srgbClr val="0000CC"/>
+                </a:solidFill>
+              </a:defRPr>
+            </a:pPr>
+            <a:r>
+              <a:t>It's about going home whole."</a:t>
+            </a:r>
+          </a:p>
+        </p:txBody>
+      </p:sp>
+      <p:sp>
+        <p:nvSpPr>
+          <p:cNvPr id="10" name="TextBox 9"/>
+          <p:cNvSpPr txBox="1"/>
+          <p:nvPr/>
+        </p:nvSpPr>
+        <p:spPr>
+          <a:xfrm>
+            <a:off x="4572000" y="3657600"/>
+            <a:ext cx="7132320" cy="2286000"/>
+          </a:xfrm>
+          <a:prstGeom prst="rect">
+            <a:avLst/>
+          </a:prstGeom>
+          <a:noFill/>
+        </p:spPr>
+        <p:txBody>
+          <a:bodyPr wrap="square">
+            <a:spAutoFit/>
+          </a:bodyPr>
+          <a:lstStyle/>
+          <a:p>
+            <a:pPr>
+              <a:defRPr sz="1800" b="1">
+                <a:solidFill>
+                  <a:srgbClr val="333333"/>
+                </a:solidFill>
+              </a:defRPr>
+            </a:pPr>
+            <a:r>
+              <a:t>DISCUSSION QUESTIONS</a:t>
+            </a:r>
+          </a:p>
+          <a:p>
+            <a:pPr>
+              <a:spcBef>
+                <a:spcPts val="1200"/>
+              </a:spcBef>
+              <a:defRPr sz="1600">
+                <a:solidFill>
+                  <a:srgbClr val="666666"/>
+                </a:solidFill>
+              </a:defRPr>
+            </a:pPr>
+            <a:r>
+              <a:t>  What's one thing that recharges you outside of work?</a:t>
+            </a:r>
+          </a:p>
+          <a:p>
+            <a:pPr>
+              <a:spcBef>
+                <a:spcPts val="1200"/>
+              </a:spcBef>
+              <a:defRPr sz="1600">
+                <a:solidFill>
+                  <a:srgbClr val="666666"/>
+                </a:solidFill>
+              </a:defRPr>
+            </a:pPr>
+            <a:r>
+              <a:t>  Have you ever noticed a coworker struggling? What did you do?</a:t>
+            </a:r>
+          </a:p>
+          <a:p>
+            <a:pPr>
+              <a:spcBef>
+                <a:spcPts val="1200"/>
+              </a:spcBef>
+              <a:defRPr sz="1600">
+                <a:solidFill>
+                  <a:srgbClr val="666666"/>
+                </a:solidFill>
+              </a:defRPr>
+            </a:pPr>
+            <a:r>
+              <a:t>  What would make it easier for YOU to ask for help on this team?</a:t>
             </a:r>
           </a:p>
         </p:txBody>
